--- a/GOAI_MxsDoc_AI_方案PPT.pptx
+++ b/GOAI_MxsDoc_AI_方案PPT.pptx
@@ -8,7 +8,7 @@
     <p:sldId id="256" r:id="rId2"/>
     <p:sldId id="257" r:id="rId3"/>
     <p:sldId id="258" r:id="rId4"/>
-    <p:sldId id="259" r:id="rId5"/>
+    <p:sldId id="271" r:id="rId5"/>
     <p:sldId id="260" r:id="rId6"/>
     <p:sldId id="261" r:id="rId7"/>
     <p:sldId id="263" r:id="rId8"/>
@@ -258,7 +258,7 @@
           <a:p>
             <a:fld id="{D997B5FA-0921-464F-AAE1-844C04324D75}" type="datetimeFigureOut">
               <a:rPr lang="zh-CN" altLang="en-US" smtClean="0"/>
-              <a:t>2026/8/2</a:t>
+              <a:t>2026/8/3</a:t>
             </a:fld>
             <a:endParaRPr lang="zh-CN" altLang="en-US"/>
           </a:p>
@@ -421,7 +421,7 @@
           <a:p>
             <a:fld id="{D997B5FA-0921-464F-AAE1-844C04324D75}" type="datetimeFigureOut">
               <a:rPr lang="zh-CN" altLang="en-US" smtClean="0"/>
-              <a:t>2026/8/2</a:t>
+              <a:t>2026/8/3</a:t>
             </a:fld>
             <a:endParaRPr lang="zh-CN" altLang="en-US"/>
           </a:p>
@@ -594,7 +594,7 @@
           <a:p>
             <a:fld id="{D997B5FA-0921-464F-AAE1-844C04324D75}" type="datetimeFigureOut">
               <a:rPr lang="zh-CN" altLang="en-US" smtClean="0"/>
-              <a:t>2026/8/2</a:t>
+              <a:t>2026/8/3</a:t>
             </a:fld>
             <a:endParaRPr lang="zh-CN" altLang="en-US"/>
           </a:p>
@@ -757,7 +757,7 @@
           <a:p>
             <a:fld id="{D997B5FA-0921-464F-AAE1-844C04324D75}" type="datetimeFigureOut">
               <a:rPr lang="zh-CN" altLang="en-US" smtClean="0"/>
-              <a:t>2026/8/2</a:t>
+              <a:t>2026/8/3</a:t>
             </a:fld>
             <a:endParaRPr lang="zh-CN" altLang="en-US"/>
           </a:p>
@@ -997,7 +997,7 @@
           <a:p>
             <a:fld id="{D997B5FA-0921-464F-AAE1-844C04324D75}" type="datetimeFigureOut">
               <a:rPr lang="zh-CN" altLang="en-US" smtClean="0"/>
-              <a:t>2026/8/2</a:t>
+              <a:t>2026/8/3</a:t>
             </a:fld>
             <a:endParaRPr lang="zh-CN" altLang="en-US"/>
           </a:p>
@@ -1221,7 +1221,7 @@
           <a:p>
             <a:fld id="{D997B5FA-0921-464F-AAE1-844C04324D75}" type="datetimeFigureOut">
               <a:rPr lang="zh-CN" altLang="en-US" smtClean="0"/>
-              <a:t>2026/8/2</a:t>
+              <a:t>2026/8/3</a:t>
             </a:fld>
             <a:endParaRPr lang="zh-CN" altLang="en-US"/>
           </a:p>
@@ -1580,7 +1580,7 @@
           <a:p>
             <a:fld id="{D997B5FA-0921-464F-AAE1-844C04324D75}" type="datetimeFigureOut">
               <a:rPr lang="zh-CN" altLang="en-US" smtClean="0"/>
-              <a:t>2026/8/2</a:t>
+              <a:t>2026/8/3</a:t>
             </a:fld>
             <a:endParaRPr lang="zh-CN" altLang="en-US"/>
           </a:p>
@@ -1692,7 +1692,7 @@
           <a:p>
             <a:fld id="{D997B5FA-0921-464F-AAE1-844C04324D75}" type="datetimeFigureOut">
               <a:rPr lang="zh-CN" altLang="en-US" smtClean="0"/>
-              <a:t>2026/8/2</a:t>
+              <a:t>2026/8/3</a:t>
             </a:fld>
             <a:endParaRPr lang="zh-CN" altLang="en-US"/>
           </a:p>
@@ -1782,7 +1782,7 @@
           <a:p>
             <a:fld id="{D997B5FA-0921-464F-AAE1-844C04324D75}" type="datetimeFigureOut">
               <a:rPr lang="zh-CN" altLang="en-US" smtClean="0"/>
-              <a:t>2026/8/2</a:t>
+              <a:t>2026/8/3</a:t>
             </a:fld>
             <a:endParaRPr lang="zh-CN" altLang="en-US"/>
           </a:p>
@@ -2052,7 +2052,7 @@
           <a:p>
             <a:fld id="{D997B5FA-0921-464F-AAE1-844C04324D75}" type="datetimeFigureOut">
               <a:rPr lang="zh-CN" altLang="en-US" smtClean="0"/>
-              <a:t>2026/8/2</a:t>
+              <a:t>2026/8/3</a:t>
             </a:fld>
             <a:endParaRPr lang="zh-CN" altLang="en-US"/>
           </a:p>
@@ -2299,7 +2299,7 @@
           <a:p>
             <a:fld id="{D997B5FA-0921-464F-AAE1-844C04324D75}" type="datetimeFigureOut">
               <a:rPr lang="zh-CN" altLang="en-US" smtClean="0"/>
-              <a:t>2026/8/2</a:t>
+              <a:t>2026/8/3</a:t>
             </a:fld>
             <a:endParaRPr lang="zh-CN" altLang="en-US"/>
           </a:p>
@@ -2505,7 +2505,7 @@
           <a:p>
             <a:fld id="{D997B5FA-0921-464F-AAE1-844C04324D75}" type="datetimeFigureOut">
               <a:rPr lang="zh-CN" altLang="en-US" smtClean="0"/>
-              <a:t>2026/8/2</a:t>
+              <a:t>2026/8/3</a:t>
             </a:fld>
             <a:endParaRPr lang="zh-CN" altLang="en-US"/>
           </a:p>
@@ -3068,30 +3068,40 @@
               <a:t>                     </a:t>
             </a:r>
             <a:r>
-              <a:rPr lang="zh-CN" altLang="zh-CN" sz="1800" dirty="0">
+              <a:rPr lang="zh-CN" altLang="zh-CN" sz="1800" b="1" dirty="0">
                 <a:solidFill>
                   <a:schemeClr val="bg2">
                     <a:lumMod val="50000"/>
                   </a:schemeClr>
                 </a:solidFill>
               </a:rPr>
-              <a:t>赛道：新智基座（Agent Infra） | 个人参赛</a:t>
-            </a:r>
-          </a:p>
-          <a:p>
-            <a:pPr lvl="0" algn="l"/>
-            <a:r>
-              <a:rPr lang="en-US" altLang="zh-CN" sz="1800" dirty="0">
+              <a:t>赛道：</a:t>
+            </a:r>
+            <a:r>
+              <a:rPr lang="zh-CN" altLang="zh-CN" sz="1800" dirty="0">
                 <a:solidFill>
                   <a:schemeClr val="bg2">
                     <a:lumMod val="50000"/>
                   </a:schemeClr>
                 </a:solidFill>
               </a:rPr>
+              <a:t>新智基座（Agent Infra） | 个人参赛</a:t>
+            </a:r>
+          </a:p>
+          <a:p>
+            <a:pPr lvl="0" algn="l"/>
+            <a:r>
+              <a:rPr lang="en-US" altLang="zh-CN" sz="1800" dirty="0">
+                <a:solidFill>
+                  <a:schemeClr val="bg2">
+                    <a:lumMod val="50000"/>
+                  </a:schemeClr>
+                </a:solidFill>
+              </a:rPr>
               <a:t>                     </a:t>
             </a:r>
             <a:r>
-              <a:rPr lang="zh-CN" altLang="zh-CN" sz="1800" dirty="0">
+              <a:rPr lang="zh-CN" altLang="zh-CN" sz="1800" b="1" dirty="0">
                 <a:solidFill>
                   <a:schemeClr val="bg2">
                     <a:lumMod val="50000"/>
@@ -3137,14 +3147,24 @@
               <a:t>                     </a:t>
             </a:r>
             <a:r>
-              <a:rPr lang="zh-CN" altLang="zh-CN" sz="1800" dirty="0">
+              <a:rPr lang="zh-CN" altLang="zh-CN" sz="1800" b="1" dirty="0">
                 <a:solidFill>
                   <a:schemeClr val="bg2">
                     <a:lumMod val="50000"/>
                   </a:schemeClr>
                 </a:solidFill>
               </a:rPr>
-              <a:t>技术栈：Java 8 + Spring MVC + MyBatis + OkHttp + Micrometer + Bucket4j</a:t>
+              <a:t>技术栈：</a:t>
+            </a:r>
+            <a:r>
+              <a:rPr lang="zh-CN" altLang="zh-CN" sz="1800" dirty="0">
+                <a:solidFill>
+                  <a:schemeClr val="bg2">
+                    <a:lumMod val="50000"/>
+                  </a:schemeClr>
+                </a:solidFill>
+              </a:rPr>
+              <a:t>Java 8 + Spring MVC + MyBatis + OkHttp + Micrometer + Bucket4j</a:t>
             </a:r>
           </a:p>
           <a:p>
@@ -6081,41 +6101,101 @@
             <a:r>
               <a:rPr lang="zh-CN" altLang="zh-CN" sz="1300" b="1" dirty="0">
                 <a:solidFill>
+                  <a:schemeClr val="accent6">
+                    <a:lumMod val="75000"/>
+                  </a:schemeClr>
+                </a:solidFill>
+              </a:rPr>
+              <a:t>缺权限隔离</a:t>
+            </a:r>
+            <a:r>
+              <a:rPr lang="zh-CN" altLang="zh-CN" sz="1300" b="1" dirty="0">
+                <a:solidFill>
                   <a:schemeClr val="bg2">
                     <a:lumMod val="50000"/>
                   </a:schemeClr>
                 </a:solidFill>
               </a:rPr>
-              <a:t>缺权限隔离、缺操作审计、缺稳定接入、缺可观测</a:t>
-            </a:r>
-            <a:r>
-              <a:rPr lang="zh-CN" altLang="zh-CN" sz="1300" dirty="0">
+              <a:t>、</a:t>
+            </a:r>
+            <a:r>
+              <a:rPr lang="zh-CN" altLang="zh-CN" sz="1300" b="1" dirty="0">
+                <a:solidFill>
+                  <a:schemeClr val="accent6">
+                    <a:lumMod val="75000"/>
+                  </a:schemeClr>
+                </a:solidFill>
+              </a:rPr>
+              <a:t>缺操作审计</a:t>
+            </a:r>
+            <a:r>
+              <a:rPr lang="zh-CN" altLang="zh-CN" sz="1300" b="1" dirty="0">
                 <a:solidFill>
                   <a:schemeClr val="bg2">
                     <a:lumMod val="50000"/>
                   </a:schemeClr>
                 </a:solidFill>
               </a:rPr>
-              <a:t>。</a:t>
-            </a:r>
-          </a:p>
-          <a:p>
-            <a:pPr lvl="0"/>
-            <a:r>
-              <a:rPr lang="zh-CN" altLang="zh-CN" sz="1300" dirty="0">
+              <a:t>、</a:t>
+            </a:r>
+            <a:r>
+              <a:rPr lang="zh-CN" altLang="zh-CN" sz="1300" b="1" dirty="0">
+                <a:solidFill>
+                  <a:schemeClr val="accent6">
+                    <a:lumMod val="75000"/>
+                  </a:schemeClr>
+                </a:solidFill>
+              </a:rPr>
+              <a:t>缺稳定接入</a:t>
+            </a:r>
+            <a:r>
+              <a:rPr lang="zh-CN" altLang="zh-CN" sz="1300" b="1" dirty="0">
                 <a:solidFill>
                   <a:schemeClr val="bg2">
                     <a:lumMod val="50000"/>
                   </a:schemeClr>
                 </a:solidFill>
               </a:rPr>
-              <a:t>企业文档管理场景中，用户需要"查文档 / 建仓库 / 上传文件 / 全文检索 / 知识问答"，但操作必须</a:t>
+              <a:t>、</a:t>
             </a:r>
             <a:r>
               <a:rPr lang="zh-CN" altLang="zh-CN" sz="1300" b="1" dirty="0">
+                <a:solidFill>
+                  <a:schemeClr val="accent6">
+                    <a:lumMod val="75000"/>
+                  </a:schemeClr>
+                </a:solidFill>
+              </a:rPr>
+              <a:t>缺可观测</a:t>
+            </a:r>
+            <a:r>
+              <a:rPr lang="zh-CN" altLang="zh-CN" sz="1300" dirty="0">
                 <a:solidFill>
                   <a:schemeClr val="bg2">
                     <a:lumMod val="50000"/>
+                  </a:schemeClr>
+                </a:solidFill>
+              </a:rPr>
+              <a:t>。</a:t>
+            </a:r>
+          </a:p>
+          <a:p>
+            <a:pPr lvl="0"/>
+            <a:r>
+              <a:rPr lang="zh-CN" altLang="zh-CN" sz="1300" dirty="0">
+                <a:solidFill>
+                  <a:schemeClr val="bg2">
+                    <a:lumMod val="50000"/>
+                  </a:schemeClr>
+                </a:solidFill>
+              </a:rPr>
+              <a:t>企业文档管理场景中，用户需要"查文档 / 建仓库 / 上传文件 / 全文检索 / 知识问答"，但操作必须</a:t>
+            </a:r>
+            <a:r>
+              <a:rPr lang="zh-CN" altLang="zh-CN" sz="1300" b="1" dirty="0">
+                <a:solidFill>
+                  <a:schemeClr val="accent4">
+                    <a:lumMod val="75000"/>
                   </a:schemeClr>
                 </a:solidFill>
               </a:rPr>
@@ -6209,15 +6289,33 @@
               <a:buNone/>
             </a:pPr>
             <a:r>
-              <a:rPr lang="zh-CN" altLang="zh-CN" dirty="0"/>
+              <a:rPr lang="zh-CN" altLang="zh-CN" dirty="0">
+                <a:solidFill>
+                  <a:schemeClr val="accent4">
+                    <a:lumMod val="75000"/>
+                  </a:schemeClr>
+                </a:solidFill>
+              </a:rPr>
               <a:t>真正的挑战不是让一个 Agent 更聪明，而是让一组 Agent 在真实企业系统里</a:t>
             </a:r>
             <a:r>
-              <a:rPr lang="zh-CN" altLang="zh-CN" b="1" dirty="0"/>
+              <a:rPr lang="zh-CN" altLang="zh-CN" b="1" dirty="0">
+                <a:solidFill>
+                  <a:schemeClr val="accent6">
+                    <a:lumMod val="75000"/>
+                  </a:schemeClr>
+                </a:solidFill>
+              </a:rPr>
               <a:t>可信、可控、可观测</a:t>
             </a:r>
             <a:r>
-              <a:rPr lang="zh-CN" altLang="zh-CN" dirty="0"/>
+              <a:rPr lang="zh-CN" altLang="zh-CN" dirty="0">
+                <a:solidFill>
+                  <a:schemeClr val="accent4">
+                    <a:lumMod val="75000"/>
+                  </a:schemeClr>
+                </a:solidFill>
+              </a:rPr>
               <a:t>地协同工作。</a:t>
             </a:r>
           </a:p>
@@ -6293,7 +6391,7 @@
                   </a:schemeClr>
                 </a:solidFill>
               </a:rPr>
-              <a:t>核心价值主张</a:t>
+              <a:t>核心价值</a:t>
             </a:r>
           </a:p>
         </p:txBody>
@@ -6327,15 +6425,24 @@
               </a:lnSpc>
             </a:pPr>
             <a:r>
-              <a:rPr lang="zh-CN" altLang="zh-CN" sz="2400" b="1" dirty="0">
-                <a:solidFill>
-                  <a:schemeClr val="tx1">
-                    <a:lumMod val="75000"/>
-                    <a:lumOff val="25000"/>
-                  </a:schemeClr>
-                </a:solidFill>
-              </a:rPr>
-              <a:t>三个"真"：</a:t>
+              <a:rPr lang="zh-CN" altLang="zh-CN" sz="1400" b="1" dirty="0">
+                <a:solidFill>
+                  <a:schemeClr val="bg2">
+                    <a:lumMod val="50000"/>
+                  </a:schemeClr>
+                </a:solidFill>
+              </a:rPr>
+              <a:t>真实系统：</a:t>
+            </a:r>
+            <a:r>
+              <a:rPr lang="zh-CN" altLang="zh-CN" sz="1400" dirty="0">
+                <a:solidFill>
+                  <a:schemeClr val="bg2">
+                    <a:lumMod val="50000"/>
+                  </a:schemeClr>
+                </a:solidFill>
+              </a:rPr>
+              <a:t>构建在 MxsDoc 开源文档系统之上，非模拟场景</a:t>
             </a:r>
           </a:p>
           <a:p>
@@ -6345,14 +6452,24 @@
               </a:lnSpc>
             </a:pPr>
             <a:r>
-              <a:rPr lang="zh-CN" altLang="zh-CN" sz="1400" dirty="0">
+              <a:rPr lang="zh-CN" altLang="zh-CN" sz="1400" b="1" dirty="0">
                 <a:solidFill>
                   <a:schemeClr val="bg2">
                     <a:lumMod val="50000"/>
                   </a:schemeClr>
                 </a:solidFill>
               </a:rPr>
-              <a:t>真实系统：构建在 MxsDoc 开源文档系统之上，非模拟场景</a:t>
+              <a:t>真实权限：</a:t>
+            </a:r>
+            <a:r>
+              <a:rPr lang="zh-CN" altLang="zh-CN" sz="1400" dirty="0">
+                <a:solidFill>
+                  <a:schemeClr val="bg2">
+                    <a:lumMod val="50000"/>
+                  </a:schemeClr>
+                </a:solidFill>
+              </a:rPr>
+              <a:t>Agent 与 MxsDoc 共享登录会话，以当前用户真实权限执行</a:t>
             </a:r>
           </a:p>
           <a:p>
@@ -6362,15 +6479,32 @@
               </a:lnSpc>
             </a:pPr>
             <a:r>
-              <a:rPr lang="zh-CN" altLang="zh-CN" sz="1400" dirty="0">
+              <a:rPr lang="zh-CN" altLang="zh-CN" sz="1400" b="1" dirty="0">
                 <a:solidFill>
                   <a:schemeClr val="bg2">
                     <a:lumMod val="50000"/>
                   </a:schemeClr>
                 </a:solidFill>
               </a:rPr>
-              <a:t>真实权限：Agent 与 MxsDoc 共享登录会话，以当前用户真实权限执行</a:t>
-            </a:r>
+              <a:t>真实审计：</a:t>
+            </a:r>
+            <a:r>
+              <a:rPr lang="zh-CN" altLang="zh-CN" sz="1400" dirty="0">
+                <a:solidFill>
+                  <a:schemeClr val="bg2">
+                    <a:lumMod val="50000"/>
+                  </a:schemeClr>
+                </a:solidFill>
+              </a:rPr>
+              <a:t>写操作全程留痕，SHA-256 脱敏，SSE 二次确认</a:t>
+            </a:r>
+            <a:endParaRPr lang="en-US" altLang="zh-CN" sz="1400" dirty="0">
+              <a:solidFill>
+                <a:schemeClr val="bg2">
+                  <a:lumMod val="50000"/>
+                </a:schemeClr>
+              </a:solidFill>
+            </a:endParaRPr>
           </a:p>
           <a:p>
             <a:pPr>
@@ -6378,99 +6512,7 @@
                 <a:spcPct val="100000"/>
               </a:lnSpc>
             </a:pPr>
-            <a:r>
-              <a:rPr lang="zh-CN" altLang="zh-CN" sz="1400" dirty="0">
-                <a:solidFill>
-                  <a:schemeClr val="bg2">
-                    <a:lumMod val="50000"/>
-                  </a:schemeClr>
-                </a:solidFill>
-              </a:rPr>
-              <a:t>真实审计：写操作全程留痕，SHA-256 脱敏，SSE 二次确认</a:t>
-            </a:r>
-          </a:p>
-          <a:p>
-            <a:pPr>
-              <a:lnSpc>
-                <a:spcPct val="100000"/>
-              </a:lnSpc>
-            </a:pPr>
-            <a:r>
-              <a:rPr lang="zh-CN" altLang="zh-CN" sz="2400" b="1" dirty="0">
-                <a:solidFill>
-                  <a:schemeClr val="tx1">
-                    <a:lumMod val="75000"/>
-                    <a:lumOff val="25000"/>
-                  </a:schemeClr>
-                </a:solidFill>
-              </a:rPr>
-              <a:t>三个"可"：</a:t>
-            </a:r>
-          </a:p>
-          <a:p>
-            <a:pPr lvl="0">
-              <a:lnSpc>
-                <a:spcPct val="110000"/>
-              </a:lnSpc>
-            </a:pPr>
-            <a:r>
-              <a:rPr lang="zh-CN" altLang="zh-CN" sz="1400" dirty="0">
-                <a:solidFill>
-                  <a:schemeClr val="bg2">
-                    <a:lumMod val="50000"/>
-                  </a:schemeClr>
-                </a:solidFill>
-              </a:rPr>
-              <a:t>可信：权限隔离 + 写操作审批 + 限流保护</a:t>
-            </a:r>
-          </a:p>
-          <a:p>
-            <a:pPr lvl="0">
-              <a:lnSpc>
-                <a:spcPct val="110000"/>
-              </a:lnSpc>
-            </a:pPr>
-            <a:r>
-              <a:rPr lang="zh-CN" altLang="zh-CN" sz="1400" dirty="0">
-                <a:solidFill>
-                  <a:schemeClr val="bg2">
-                    <a:lumMod val="50000"/>
-                  </a:schemeClr>
-                </a:solidFill>
-              </a:rPr>
-              <a:t>可控：五态任务状态机 + 超时恢复 + 失败重试上限</a:t>
-            </a:r>
-          </a:p>
-          <a:p>
-            <a:pPr lvl="0">
-              <a:lnSpc>
-                <a:spcPct val="110000"/>
-              </a:lnSpc>
-            </a:pPr>
-            <a:r>
-              <a:rPr lang="zh-CN" altLang="zh-CN" sz="1400" dirty="0">
-                <a:solidFill>
-                  <a:schemeClr val="bg2">
-                    <a:lumMod val="50000"/>
-                  </a:schemeClr>
-                </a:solidFill>
-              </a:rPr>
-              <a:t>可观测：Micrometer 指标 + 健康探针 + MDC 日志 + Step 审计</a:t>
-            </a:r>
-          </a:p>
-          <a:p>
-            <a:r>
-              <a:rPr lang="zh-CN" altLang="zh-CN" sz="2400" b="1" dirty="0">
-                <a:solidFill>
-                  <a:schemeClr val="tx1">
-                    <a:lumMod val="75000"/>
-                    <a:lumOff val="25000"/>
-                  </a:schemeClr>
-                </a:solidFill>
-              </a:rPr>
-              <a:t>复用价值：</a:t>
-            </a:r>
-            <a:endParaRPr lang="en-US" altLang="zh-CN" sz="2400" b="1" dirty="0">
+            <a:endParaRPr lang="zh-CN" altLang="zh-CN" sz="2400" b="1" dirty="0">
               <a:solidFill>
                 <a:schemeClr val="tx1">
                   <a:lumMod val="75000"/>
@@ -6480,20 +6522,20 @@
             </a:endParaRPr>
           </a:p>
           <a:p>
-            <a:pPr>
+            <a:pPr lvl="0">
               <a:lnSpc>
-                <a:spcPct val="120000"/>
+                <a:spcPct val="110000"/>
               </a:lnSpc>
             </a:pPr>
             <a:r>
-              <a:rPr lang="zh-CN" altLang="zh-CN" sz="1400" dirty="0">
+              <a:rPr lang="zh-CN" altLang="zh-CN" sz="1400" b="1" dirty="0">
                 <a:solidFill>
                   <a:schemeClr val="bg2">
                     <a:lumMod val="50000"/>
                   </a:schemeClr>
                 </a:solidFill>
               </a:rPr>
-              <a:t>任何企业系统均可按此模式（可插拔 Skill 执行器 + </a:t>
+              <a:t>可信：</a:t>
             </a:r>
             <a:r>
               <a:rPr lang="zh-CN" altLang="zh-CN" sz="1400" dirty="0">
@@ -6502,25 +6544,128 @@
                     <a:lumMod val="50000"/>
                   </a:schemeClr>
                 </a:solidFill>
-                <a:hlinkClick r:id="rId2">
-                  <a:extLst>
-                    <a:ext uri="{A12FA001-AC4F-418D-AE19-62706E023703}">
-                      <ahyp:hlinkClr xmlns:ahyp="http://schemas.microsoft.com/office/drawing/2018/hyperlinkcolor" val="tx"/>
-                    </a:ext>
-                  </a:extLst>
-                </a:hlinkClick>
-              </a:rPr>
-              <a:t>SKILL.md</a:t>
-            </a:r>
-            <a:r>
-              <a:rPr lang="zh-CN" altLang="zh-CN" sz="1400" dirty="0">
+              </a:rPr>
+              <a:t>权限隔离 + 写操作审批 + 限流保护</a:t>
+            </a:r>
+          </a:p>
+          <a:p>
+            <a:pPr lvl="0">
+              <a:lnSpc>
+                <a:spcPct val="110000"/>
+              </a:lnSpc>
+            </a:pPr>
+            <a:r>
+              <a:rPr lang="zh-CN" altLang="zh-CN" sz="1400" b="1" dirty="0">
                 <a:solidFill>
                   <a:schemeClr val="bg2">
                     <a:lumMod val="50000"/>
                   </a:schemeClr>
                 </a:solidFill>
               </a:rPr>
-              <a:t> 标准 + 审计/限流横切）接入多 Agent 能力。</a:t>
+              <a:t>可控：</a:t>
+            </a:r>
+            <a:r>
+              <a:rPr lang="zh-CN" altLang="zh-CN" sz="1400" dirty="0">
+                <a:solidFill>
+                  <a:schemeClr val="bg2">
+                    <a:lumMod val="50000"/>
+                  </a:schemeClr>
+                </a:solidFill>
+              </a:rPr>
+              <a:t>五态任务状态机 + 超时恢复 + 失败重试上限</a:t>
+            </a:r>
+          </a:p>
+          <a:p>
+            <a:pPr lvl="0">
+              <a:lnSpc>
+                <a:spcPct val="110000"/>
+              </a:lnSpc>
+            </a:pPr>
+            <a:r>
+              <a:rPr lang="zh-CN" altLang="zh-CN" sz="1400" b="1" dirty="0">
+                <a:solidFill>
+                  <a:schemeClr val="bg2">
+                    <a:lumMod val="50000"/>
+                  </a:schemeClr>
+                </a:solidFill>
+              </a:rPr>
+              <a:t>可观测：</a:t>
+            </a:r>
+            <a:r>
+              <a:rPr lang="zh-CN" altLang="zh-CN" sz="1400" dirty="0">
+                <a:solidFill>
+                  <a:schemeClr val="bg2">
+                    <a:lumMod val="50000"/>
+                  </a:schemeClr>
+                </a:solidFill>
+              </a:rPr>
+              <a:t>Micrometer 指标 + 健康探针 + MDC 日志 + Step 审计</a:t>
+            </a:r>
+            <a:endParaRPr lang="en-US" altLang="zh-CN" sz="1400" dirty="0">
+              <a:solidFill>
+                <a:schemeClr val="bg2">
+                  <a:lumMod val="50000"/>
+                </a:schemeClr>
+              </a:solidFill>
+            </a:endParaRPr>
+          </a:p>
+          <a:p>
+            <a:pPr lvl="0">
+              <a:lnSpc>
+                <a:spcPct val="110000"/>
+              </a:lnSpc>
+            </a:pPr>
+            <a:endParaRPr lang="en-US" altLang="zh-CN" sz="1400" dirty="0">
+              <a:solidFill>
+                <a:schemeClr val="bg2">
+                  <a:lumMod val="50000"/>
+                </a:schemeClr>
+              </a:solidFill>
+            </a:endParaRPr>
+          </a:p>
+          <a:p>
+            <a:pPr lvl="0">
+              <a:lnSpc>
+                <a:spcPct val="110000"/>
+              </a:lnSpc>
+            </a:pPr>
+            <a:r>
+              <a:rPr lang="zh-CN" altLang="zh-CN" sz="1400" b="1" dirty="0">
+                <a:solidFill>
+                  <a:schemeClr val="bg2">
+                    <a:lumMod val="50000"/>
+                  </a:schemeClr>
+                </a:solidFill>
+              </a:rPr>
+              <a:t>复用价值：</a:t>
+            </a:r>
+            <a:r>
+              <a:rPr lang="zh-CN" altLang="zh-CN" sz="1400" dirty="0">
+                <a:solidFill>
+                  <a:schemeClr val="bg2">
+                    <a:lumMod val="50000"/>
+                  </a:schemeClr>
+                </a:solidFill>
+              </a:rPr>
+              <a:t>任何企业系统均可按此模式（可插拔 Skill 执行器 + </a:t>
+            </a:r>
+            <a:r>
+              <a:rPr lang="zh-CN" altLang="zh-CN" sz="1400" u="sng" dirty="0">
+                <a:solidFill>
+                  <a:schemeClr val="accent1"/>
+                </a:solidFill>
+              </a:rPr>
+              <a:t>SKILL.md </a:t>
+            </a:r>
+            <a:r>
+              <a:rPr lang="zh-CN" altLang="zh-CN" sz="1400" dirty="0">
+                <a:solidFill>
+                  <a:schemeClr val="bg2">
+                    <a:lumMod val="50000"/>
+                  </a:schemeClr>
+                </a:solidFill>
+              </a:rPr>
+              <a:t>标准 + 审计/限流横切）接入多 Agent 能力。</a:t>
             </a:r>
           </a:p>
         </p:txBody>
@@ -6546,7 +6691,7 @@
         <p:cNvPr id="1" name="">
           <a:extLst>
             <a:ext uri="{FF2B5EF4-FFF2-40B4-BE49-F238E27FC236}">
-              <a16:creationId xmlns:a16="http://schemas.microsoft.com/office/drawing/2014/main" id="{82C7CAFD-CA36-F263-C316-59D550D04E3C}"/>
+              <a16:creationId xmlns:a16="http://schemas.microsoft.com/office/drawing/2014/main" id="{EF93B5F6-F4F6-FDE6-7519-73E310AF7AD0}"/>
             </a:ext>
           </a:extLst>
         </p:cNvPr>
@@ -6563,10 +6708,56 @@
       </p:grpSpPr>
       <p:sp>
         <p:nvSpPr>
-          <p:cNvPr id="79" name="矩形 78">
+          <p:cNvPr id="2" name="标题 1">
             <a:extLst>
               <a:ext uri="{FF2B5EF4-FFF2-40B4-BE49-F238E27FC236}">
-                <a16:creationId xmlns:a16="http://schemas.microsoft.com/office/drawing/2014/main" id="{9E2B3C82-8F87-E786-BD6B-80317D083320}"/>
+                <a16:creationId xmlns:a16="http://schemas.microsoft.com/office/drawing/2014/main" id="{4BFA1C8F-EB95-08A9-2EE3-6C0442A5A9E9}"/>
+              </a:ext>
+            </a:extLst>
+          </p:cNvPr>
+          <p:cNvSpPr>
+            <a:spLocks noGrp="1"/>
+          </p:cNvSpPr>
+          <p:nvPr>
+            <p:ph type="title"/>
+          </p:nvPr>
+        </p:nvSpPr>
+        <p:spPr/>
+        <p:txBody>
+          <a:bodyPr>
+            <a:normAutofit/>
+          </a:bodyPr>
+          <a:lstStyle/>
+          <a:p>
+            <a:r>
+              <a:rPr lang="zh-CN" altLang="en-US" sz="4000" b="1" dirty="0">
+                <a:solidFill>
+                  <a:schemeClr val="accent4">
+                    <a:lumMod val="75000"/>
+                  </a:schemeClr>
+                </a:solidFill>
+              </a:rPr>
+              <a:t>系统</a:t>
+            </a:r>
+            <a:r>
+              <a:rPr lang="zh-CN" altLang="zh-CN" sz="4000" b="1" dirty="0">
+                <a:solidFill>
+                  <a:schemeClr val="accent4">
+                    <a:lumMod val="75000"/>
+                  </a:schemeClr>
+                </a:solidFill>
+              </a:rPr>
+              <a:t>架构</a:t>
+            </a:r>
+          </a:p>
+        </p:txBody>
+      </p:sp>
+      <p:sp>
+        <p:nvSpPr>
+          <p:cNvPr id="6" name="矩形 5">
+            <a:extLst>
+              <a:ext uri="{FF2B5EF4-FFF2-40B4-BE49-F238E27FC236}">
+                <a16:creationId xmlns:a16="http://schemas.microsoft.com/office/drawing/2014/main" id="{D7B23A61-4CED-7FF6-3DA2-7F35CFEBDCF6}"/>
               </a:ext>
             </a:extLst>
           </p:cNvPr>
@@ -6575,8 +6766,8 @@
         </p:nvSpPr>
         <p:spPr>
           <a:xfrm>
-            <a:off x="613691" y="1448311"/>
-            <a:ext cx="10432752" cy="5332977"/>
+            <a:off x="613691" y="2000682"/>
+            <a:ext cx="10432752" cy="4755718"/>
           </a:xfrm>
           <a:prstGeom prst="rect">
             <a:avLst/>
@@ -6612,51 +6803,10 @@
       </p:sp>
       <p:sp>
         <p:nvSpPr>
-          <p:cNvPr id="2" name="标题 1">
+          <p:cNvPr id="7" name="矩形: 圆角 6">
             <a:extLst>
               <a:ext uri="{FF2B5EF4-FFF2-40B4-BE49-F238E27FC236}">
-                <a16:creationId xmlns:a16="http://schemas.microsoft.com/office/drawing/2014/main" id="{A765E80B-C2FA-DDD0-A305-DA712D8AA308}"/>
-              </a:ext>
-            </a:extLst>
-          </p:cNvPr>
-          <p:cNvSpPr>
-            <a:spLocks noGrp="1"/>
-          </p:cNvSpPr>
-          <p:nvPr>
-            <p:ph type="title"/>
-          </p:nvPr>
-        </p:nvSpPr>
-        <p:spPr>
-          <a:xfrm>
-            <a:off x="838200" y="365126"/>
-            <a:ext cx="10515600" cy="776046"/>
-          </a:xfrm>
-        </p:spPr>
-        <p:txBody>
-          <a:bodyPr>
-            <a:normAutofit/>
-          </a:bodyPr>
-          <a:lstStyle/>
-          <a:p>
-            <a:r>
-              <a:rPr lang="zh-CN" altLang="zh-CN" b="1" dirty="0">
-                <a:solidFill>
-                  <a:schemeClr val="accent4">
-                    <a:lumMod val="75000"/>
-                  </a:schemeClr>
-                </a:solidFill>
-              </a:rPr>
-              <a:t>AgentTeams 整体架构</a:t>
-            </a:r>
-          </a:p>
-        </p:txBody>
-      </p:sp>
-      <p:sp>
-        <p:nvSpPr>
-          <p:cNvPr id="8" name="矩形: 圆角 7">
-            <a:extLst>
-              <a:ext uri="{FF2B5EF4-FFF2-40B4-BE49-F238E27FC236}">
-                <a16:creationId xmlns:a16="http://schemas.microsoft.com/office/drawing/2014/main" id="{4E31877F-317F-CB77-3335-703FD4CB909F}"/>
+                <a16:creationId xmlns:a16="http://schemas.microsoft.com/office/drawing/2014/main" id="{813ABC55-BA3C-1D73-E16D-E61688FEC683}"/>
               </a:ext>
             </a:extLst>
           </p:cNvPr>
@@ -6665,8 +6815,8 @@
         </p:nvSpPr>
         <p:spPr>
           <a:xfrm>
-            <a:off x="4191510" y="1625160"/>
-            <a:ext cx="3050047" cy="378923"/>
+            <a:off x="4274061" y="2037910"/>
+            <a:ext cx="2971290" cy="223091"/>
           </a:xfrm>
           <a:prstGeom prst="roundRect">
             <a:avLst/>
@@ -6697,7 +6847,7 @@
           <a:p>
             <a:pPr algn="ctr"/>
             <a:r>
-              <a:rPr lang="zh-CN" altLang="en-US" dirty="0">
+              <a:rPr lang="zh-CN" altLang="en-US" sz="1400" dirty="0">
                 <a:solidFill>
                   <a:schemeClr val="bg1"/>
                 </a:solidFill>
@@ -6709,10 +6859,10 @@
       </p:sp>
       <p:sp>
         <p:nvSpPr>
-          <p:cNvPr id="10" name="矩形: 圆角 9">
+          <p:cNvPr id="8" name="矩形: 圆角 7">
             <a:extLst>
               <a:ext uri="{FF2B5EF4-FFF2-40B4-BE49-F238E27FC236}">
-                <a16:creationId xmlns:a16="http://schemas.microsoft.com/office/drawing/2014/main" id="{0B4D49A4-EA0B-0547-81FB-C8C55C6288FC}"/>
+                <a16:creationId xmlns:a16="http://schemas.microsoft.com/office/drawing/2014/main" id="{7A9B53F2-71F6-6EDA-152A-A904A69AE6A2}"/>
               </a:ext>
             </a:extLst>
           </p:cNvPr>
@@ -6721,7 +6871,7 @@
         </p:nvSpPr>
         <p:spPr>
           <a:xfrm>
-            <a:off x="838200" y="2317328"/>
+            <a:off x="833852" y="2460318"/>
             <a:ext cx="9863938" cy="484394"/>
           </a:xfrm>
           <a:prstGeom prst="roundRect">
@@ -6789,10 +6939,10 @@
       </p:sp>
       <p:sp>
         <p:nvSpPr>
-          <p:cNvPr id="12" name="文本框 11">
+          <p:cNvPr id="9" name="文本框 8">
             <a:extLst>
               <a:ext uri="{FF2B5EF4-FFF2-40B4-BE49-F238E27FC236}">
-                <a16:creationId xmlns:a16="http://schemas.microsoft.com/office/drawing/2014/main" id="{42197084-A753-0157-1F05-9DC00BFAC6E0}"/>
+                <a16:creationId xmlns:a16="http://schemas.microsoft.com/office/drawing/2014/main" id="{F4FA401D-3A54-8D7C-576D-69EC6326138B}"/>
               </a:ext>
             </a:extLst>
           </p:cNvPr>
@@ -6801,7 +6951,7 @@
         </p:nvSpPr>
         <p:spPr>
           <a:xfrm>
-            <a:off x="895989" y="1042783"/>
+            <a:off x="534039" y="1641826"/>
             <a:ext cx="9298509" cy="400110"/>
           </a:xfrm>
           <a:prstGeom prst="rect">
@@ -6818,22 +6968,56 @@
             <a:r>
               <a:rPr lang="zh-CN" altLang="zh-CN" sz="2000" dirty="0">
                 <a:solidFill>
+                  <a:schemeClr val="accent5"/>
+                </a:solidFill>
+              </a:rPr>
+              <a:t>5 个职能 Agent 协同工作 </a:t>
+            </a:r>
+            <a:r>
+              <a:rPr lang="zh-CN" altLang="zh-CN" sz="2000" dirty="0">
+                <a:solidFill>
                   <a:schemeClr val="bg2">
                     <a:lumMod val="25000"/>
                   </a:schemeClr>
                 </a:solidFill>
               </a:rPr>
-              <a:t>5 个职能 Agent 协同工作 · ToolUseLoop 推理引擎驱动 · 端到端任务闭环</a:t>
+              <a:t>· </a:t>
+            </a:r>
+            <a:r>
+              <a:rPr lang="zh-CN" altLang="zh-CN" sz="2000" dirty="0">
+                <a:solidFill>
+                  <a:schemeClr val="accent5"/>
+                </a:solidFill>
+              </a:rPr>
+              <a:t>ToolUseLoop 推理引擎驱动 </a:t>
+            </a:r>
+            <a:r>
+              <a:rPr lang="zh-CN" altLang="zh-CN" sz="2000" dirty="0">
+                <a:solidFill>
+                  <a:schemeClr val="bg2">
+                    <a:lumMod val="25000"/>
+                  </a:schemeClr>
+                </a:solidFill>
+              </a:rPr>
+              <a:t>· </a:t>
+            </a:r>
+            <a:r>
+              <a:rPr lang="zh-CN" altLang="zh-CN" sz="2000" dirty="0">
+                <a:solidFill>
+                  <a:schemeClr val="accent5"/>
+                </a:solidFill>
+              </a:rPr>
+              <a:t>端到端任务闭环</a:t>
             </a:r>
           </a:p>
         </p:txBody>
       </p:sp>
       <p:sp>
         <p:nvSpPr>
-          <p:cNvPr id="14" name="矩形: 圆角 13">
+          <p:cNvPr id="10" name="矩形: 圆角 9">
             <a:extLst>
               <a:ext uri="{FF2B5EF4-FFF2-40B4-BE49-F238E27FC236}">
-                <a16:creationId xmlns:a16="http://schemas.microsoft.com/office/drawing/2014/main" id="{7329A2D7-CA88-614C-9C44-1241C5F78BB0}"/>
+                <a16:creationId xmlns:a16="http://schemas.microsoft.com/office/drawing/2014/main" id="{F3C63FB2-F359-EC28-C367-43369ECD64E7}"/>
               </a:ext>
             </a:extLst>
           </p:cNvPr>
@@ -6842,7 +7026,7 @@
         </p:nvSpPr>
         <p:spPr>
           <a:xfrm>
-            <a:off x="833852" y="3170342"/>
+            <a:off x="843257" y="3294378"/>
             <a:ext cx="1406121" cy="599672"/>
           </a:xfrm>
           <a:prstGeom prst="roundRect">
@@ -6918,10 +7102,10 @@
       </p:sp>
       <p:sp>
         <p:nvSpPr>
-          <p:cNvPr id="18" name="矩形: 圆角 17">
+          <p:cNvPr id="11" name="矩形: 圆角 10">
             <a:extLst>
               <a:ext uri="{FF2B5EF4-FFF2-40B4-BE49-F238E27FC236}">
-                <a16:creationId xmlns:a16="http://schemas.microsoft.com/office/drawing/2014/main" id="{BA8233EF-B938-924F-BF4E-083EF1306523}"/>
+                <a16:creationId xmlns:a16="http://schemas.microsoft.com/office/drawing/2014/main" id="{A60A2100-91AC-6613-80BA-077F60D3D20D}"/>
               </a:ext>
             </a:extLst>
           </p:cNvPr>
@@ -6930,7 +7114,7 @@
         </p:nvSpPr>
         <p:spPr>
           <a:xfrm>
-            <a:off x="2387449" y="3180078"/>
+            <a:off x="2387449" y="3294378"/>
             <a:ext cx="1406121" cy="599672"/>
           </a:xfrm>
           <a:prstGeom prst="roundRect">
@@ -7001,10 +7185,10 @@
       </p:sp>
       <p:sp>
         <p:nvSpPr>
-          <p:cNvPr id="20" name="矩形: 圆角 19">
+          <p:cNvPr id="12" name="矩形: 圆角 11">
             <a:extLst>
               <a:ext uri="{FF2B5EF4-FFF2-40B4-BE49-F238E27FC236}">
-                <a16:creationId xmlns:a16="http://schemas.microsoft.com/office/drawing/2014/main" id="{7A6B1A9E-4A57-8873-089A-7530447DEB3C}"/>
+                <a16:creationId xmlns:a16="http://schemas.microsoft.com/office/drawing/2014/main" id="{6B14D89D-E9CF-B50E-E85E-3B4722D3BB1A}"/>
               </a:ext>
             </a:extLst>
           </p:cNvPr>
@@ -7013,7 +7197,7 @@
         </p:nvSpPr>
         <p:spPr>
           <a:xfrm>
-            <a:off x="4061014" y="3180078"/>
+            <a:off x="4061014" y="3288028"/>
             <a:ext cx="1554261" cy="599672"/>
           </a:xfrm>
           <a:prstGeom prst="roundRect">
@@ -7084,10 +7268,10 @@
       </p:sp>
       <p:sp>
         <p:nvSpPr>
-          <p:cNvPr id="22" name="矩形: 圆角 21">
+          <p:cNvPr id="13" name="矩形: 圆角 12">
             <a:extLst>
               <a:ext uri="{FF2B5EF4-FFF2-40B4-BE49-F238E27FC236}">
-                <a16:creationId xmlns:a16="http://schemas.microsoft.com/office/drawing/2014/main" id="{40C38797-C17A-0FA5-8B00-33235A13631B}"/>
+                <a16:creationId xmlns:a16="http://schemas.microsoft.com/office/drawing/2014/main" id="{C7B42232-48EA-5978-CE28-71A46DA7F6EA}"/>
               </a:ext>
             </a:extLst>
           </p:cNvPr>
@@ -7096,7 +7280,7 @@
         </p:nvSpPr>
         <p:spPr>
           <a:xfrm>
-            <a:off x="6041963" y="3180078"/>
+            <a:off x="6041963" y="3294378"/>
             <a:ext cx="4660175" cy="599672"/>
           </a:xfrm>
           <a:prstGeom prst="roundRect">
@@ -7199,10 +7383,10 @@
       </p:sp>
       <p:sp>
         <p:nvSpPr>
-          <p:cNvPr id="24" name="矩形: 圆角 23">
+          <p:cNvPr id="14" name="矩形: 圆角 13">
             <a:extLst>
               <a:ext uri="{FF2B5EF4-FFF2-40B4-BE49-F238E27FC236}">
-                <a16:creationId xmlns:a16="http://schemas.microsoft.com/office/drawing/2014/main" id="{34E913C5-762C-DEC3-63BF-327C116AD13E}"/>
+                <a16:creationId xmlns:a16="http://schemas.microsoft.com/office/drawing/2014/main" id="{6BED67CF-E416-DCFE-F295-69739368C6E9}"/>
               </a:ext>
             </a:extLst>
           </p:cNvPr>
@@ -7211,8 +7395,8 @@
         </p:nvSpPr>
         <p:spPr>
           <a:xfrm>
-            <a:off x="4373777" y="4085149"/>
-            <a:ext cx="6332656" cy="599672"/>
+            <a:off x="6041963" y="4161349"/>
+            <a:ext cx="4655827" cy="599672"/>
           </a:xfrm>
           <a:prstGeom prst="roundRect">
             <a:avLst/>
@@ -7288,10 +7472,10 @@
       </p:sp>
       <p:sp>
         <p:nvSpPr>
-          <p:cNvPr id="26" name="矩形: 圆角 25">
+          <p:cNvPr id="15" name="矩形: 圆角 14">
             <a:extLst>
               <a:ext uri="{FF2B5EF4-FFF2-40B4-BE49-F238E27FC236}">
-                <a16:creationId xmlns:a16="http://schemas.microsoft.com/office/drawing/2014/main" id="{C307FAAE-FE53-F2C0-B154-495AD22475BB}"/>
+                <a16:creationId xmlns:a16="http://schemas.microsoft.com/office/drawing/2014/main" id="{7827ED22-7FB3-41B9-C493-7A75FA622E35}"/>
               </a:ext>
             </a:extLst>
           </p:cNvPr>
@@ -7300,7 +7484,7 @@
         </p:nvSpPr>
         <p:spPr>
           <a:xfrm>
-            <a:off x="4496735" y="5042613"/>
+            <a:off x="4496735" y="5048963"/>
             <a:ext cx="1630354" cy="599672"/>
           </a:xfrm>
           <a:prstGeom prst="roundRect">
@@ -7380,10 +7564,10 @@
       </p:sp>
       <p:sp>
         <p:nvSpPr>
-          <p:cNvPr id="28" name="矩形: 圆角 27">
+          <p:cNvPr id="16" name="矩形: 圆角 15">
             <a:extLst>
               <a:ext uri="{FF2B5EF4-FFF2-40B4-BE49-F238E27FC236}">
-                <a16:creationId xmlns:a16="http://schemas.microsoft.com/office/drawing/2014/main" id="{5FC5381F-F72A-CDE3-B3CD-CD66663B021E}"/>
+                <a16:creationId xmlns:a16="http://schemas.microsoft.com/office/drawing/2014/main" id="{AD406DF4-8CA9-4AD6-6B6B-59C2AFDCEDD6}"/>
               </a:ext>
             </a:extLst>
           </p:cNvPr>
@@ -7465,10 +7649,10 @@
       </p:sp>
       <p:sp>
         <p:nvSpPr>
-          <p:cNvPr id="30" name="矩形: 圆角 29">
+          <p:cNvPr id="17" name="矩形: 圆角 16">
             <a:extLst>
               <a:ext uri="{FF2B5EF4-FFF2-40B4-BE49-F238E27FC236}">
-                <a16:creationId xmlns:a16="http://schemas.microsoft.com/office/drawing/2014/main" id="{2F245145-944A-A5E9-8AA4-38BFF77BD0F2}"/>
+                <a16:creationId xmlns:a16="http://schemas.microsoft.com/office/drawing/2014/main" id="{45183094-61B2-7E40-4052-387C16FF78D9}"/>
               </a:ext>
             </a:extLst>
           </p:cNvPr>
@@ -7553,10 +7737,10 @@
       </p:sp>
       <p:sp>
         <p:nvSpPr>
-          <p:cNvPr id="32" name="矩形: 圆角 31">
+          <p:cNvPr id="18" name="矩形: 圆角 17">
             <a:extLst>
               <a:ext uri="{FF2B5EF4-FFF2-40B4-BE49-F238E27FC236}">
-                <a16:creationId xmlns:a16="http://schemas.microsoft.com/office/drawing/2014/main" id="{8216F03F-CA95-4458-56BF-23620A3BD203}"/>
+                <a16:creationId xmlns:a16="http://schemas.microsoft.com/office/drawing/2014/main" id="{FF95F35E-993B-E66F-2081-CF3ACCA55917}"/>
               </a:ext>
             </a:extLst>
           </p:cNvPr>
@@ -7566,7 +7750,7 @@
         <p:spPr>
           <a:xfrm>
             <a:off x="833852" y="5902684"/>
-            <a:ext cx="9807555" cy="722772"/>
+            <a:ext cx="9807555" cy="653455"/>
           </a:xfrm>
           <a:prstGeom prst="roundRect">
             <a:avLst/>
@@ -7654,22 +7838,24 @@
       </p:sp>
       <p:cxnSp>
         <p:nvCxnSpPr>
-          <p:cNvPr id="34" name="直接箭头连接符 33">
+          <p:cNvPr id="19" name="直接箭头连接符 18">
             <a:extLst>
               <a:ext uri="{FF2B5EF4-FFF2-40B4-BE49-F238E27FC236}">
-                <a16:creationId xmlns:a16="http://schemas.microsoft.com/office/drawing/2014/main" id="{675B12D2-1A13-1820-31AC-DCDE0A574646}"/>
+                <a16:creationId xmlns:a16="http://schemas.microsoft.com/office/drawing/2014/main" id="{281B1FEF-821C-0DC3-8E36-05C0006D3CBB}"/>
               </a:ext>
             </a:extLst>
           </p:cNvPr>
           <p:cNvCxnSpPr>
             <a:cxnSpLocks/>
+            <a:stCxn id="7" idx="2"/>
+            <a:endCxn id="8" idx="0"/>
           </p:cNvCxnSpPr>
           <p:nvPr/>
         </p:nvCxnSpPr>
         <p:spPr>
           <a:xfrm>
-            <a:off x="5781583" y="2004083"/>
-            <a:ext cx="0" cy="313245"/>
+            <a:off x="5759706" y="2261001"/>
+            <a:ext cx="6115" cy="199317"/>
           </a:xfrm>
           <a:prstGeom prst="straightConnector1">
             <a:avLst/>
@@ -7680,13 +7866,13 @@
         </p:spPr>
         <p:style>
           <a:lnRef idx="2">
-            <a:schemeClr val="accent1"/>
+            <a:schemeClr val="accent5"/>
           </a:lnRef>
           <a:fillRef idx="0">
-            <a:schemeClr val="accent1"/>
+            <a:schemeClr val="accent5"/>
           </a:fillRef>
           <a:effectRef idx="1">
-            <a:schemeClr val="accent1"/>
+            <a:schemeClr val="accent5"/>
           </a:effectRef>
           <a:fontRef idx="minor">
             <a:schemeClr val="tx1"/>
@@ -7695,24 +7881,24 @@
       </p:cxnSp>
       <p:cxnSp>
         <p:nvCxnSpPr>
-          <p:cNvPr id="36" name="连接符: 肘形 35">
+          <p:cNvPr id="20" name="连接符: 肘形 19">
             <a:extLst>
               <a:ext uri="{FF2B5EF4-FFF2-40B4-BE49-F238E27FC236}">
-                <a16:creationId xmlns:a16="http://schemas.microsoft.com/office/drawing/2014/main" id="{C9A5D184-832B-44AD-E722-C0DB7E6EE00D}"/>
+                <a16:creationId xmlns:a16="http://schemas.microsoft.com/office/drawing/2014/main" id="{2C096512-9132-87C7-57D7-327CAD61053B}"/>
               </a:ext>
             </a:extLst>
           </p:cNvPr>
           <p:cNvCxnSpPr>
             <a:cxnSpLocks/>
-            <a:stCxn id="10" idx="2"/>
-            <a:endCxn id="14" idx="0"/>
+            <a:stCxn id="8" idx="2"/>
+            <a:endCxn id="10" idx="0"/>
           </p:cNvCxnSpPr>
           <p:nvPr/>
         </p:nvCxnSpPr>
         <p:spPr>
           <a:xfrm rot="5400000">
-            <a:off x="3469231" y="869404"/>
-            <a:ext cx="368620" cy="4233256"/>
+            <a:off x="3481237" y="1009794"/>
+            <a:ext cx="349666" cy="4219503"/>
           </a:xfrm>
           <a:prstGeom prst="bentConnector3">
             <a:avLst/>
@@ -7723,13 +7909,13 @@
         </p:spPr>
         <p:style>
           <a:lnRef idx="1">
-            <a:schemeClr val="accent1"/>
+            <a:schemeClr val="accent5"/>
           </a:lnRef>
           <a:fillRef idx="0">
-            <a:schemeClr val="accent1"/>
+            <a:schemeClr val="accent5"/>
           </a:fillRef>
           <a:effectRef idx="0">
-            <a:schemeClr val="accent1"/>
+            <a:schemeClr val="accent5"/>
           </a:effectRef>
           <a:fontRef idx="minor">
             <a:schemeClr val="tx1"/>
@@ -7738,24 +7924,24 @@
       </p:cxnSp>
       <p:cxnSp>
         <p:nvCxnSpPr>
-          <p:cNvPr id="38" name="连接符: 肘形 37">
+          <p:cNvPr id="21" name="连接符: 肘形 20">
             <a:extLst>
               <a:ext uri="{FF2B5EF4-FFF2-40B4-BE49-F238E27FC236}">
-                <a16:creationId xmlns:a16="http://schemas.microsoft.com/office/drawing/2014/main" id="{D0211474-61A9-4A9C-B17C-22F9530DF06A}"/>
+                <a16:creationId xmlns:a16="http://schemas.microsoft.com/office/drawing/2014/main" id="{97861B03-5450-9458-AB25-14812C7E0F0C}"/>
               </a:ext>
             </a:extLst>
           </p:cNvPr>
           <p:cNvCxnSpPr>
             <a:cxnSpLocks/>
-            <a:stCxn id="10" idx="2"/>
-            <a:endCxn id="22" idx="0"/>
+            <a:stCxn id="8" idx="2"/>
+            <a:endCxn id="13" idx="0"/>
           </p:cNvCxnSpPr>
           <p:nvPr/>
         </p:nvCxnSpPr>
         <p:spPr>
           <a:xfrm rot="16200000" flipH="1">
-            <a:off x="6881932" y="1689959"/>
-            <a:ext cx="378356" cy="2601882"/>
+            <a:off x="6894103" y="1816430"/>
+            <a:ext cx="349666" cy="2606230"/>
           </a:xfrm>
           <a:prstGeom prst="bentConnector3">
             <a:avLst/>
@@ -7766,13 +7952,13 @@
         </p:spPr>
         <p:style>
           <a:lnRef idx="1">
-            <a:schemeClr val="accent1"/>
+            <a:schemeClr val="accent5"/>
           </a:lnRef>
           <a:fillRef idx="0">
-            <a:schemeClr val="accent1"/>
+            <a:schemeClr val="accent5"/>
           </a:fillRef>
           <a:effectRef idx="0">
-            <a:schemeClr val="accent1"/>
+            <a:schemeClr val="accent5"/>
           </a:effectRef>
           <a:fontRef idx="minor">
             <a:schemeClr val="tx1"/>
@@ -7781,24 +7967,24 @@
       </p:cxnSp>
       <p:cxnSp>
         <p:nvCxnSpPr>
-          <p:cNvPr id="40" name="连接符: 肘形 39">
+          <p:cNvPr id="22" name="连接符: 肘形 21">
             <a:extLst>
               <a:ext uri="{FF2B5EF4-FFF2-40B4-BE49-F238E27FC236}">
-                <a16:creationId xmlns:a16="http://schemas.microsoft.com/office/drawing/2014/main" id="{2E93B947-5EFB-9C28-B51A-08B66058585E}"/>
+                <a16:creationId xmlns:a16="http://schemas.microsoft.com/office/drawing/2014/main" id="{C230950C-DE93-7EC4-636A-E2435769C538}"/>
               </a:ext>
             </a:extLst>
           </p:cNvPr>
           <p:cNvCxnSpPr>
             <a:cxnSpLocks/>
-            <a:stCxn id="10" idx="2"/>
-            <a:endCxn id="18" idx="0"/>
+            <a:stCxn id="8" idx="2"/>
+            <a:endCxn id="11" idx="0"/>
           </p:cNvCxnSpPr>
           <p:nvPr/>
         </p:nvCxnSpPr>
         <p:spPr>
           <a:xfrm rot="5400000">
-            <a:off x="4241162" y="1651071"/>
-            <a:ext cx="378356" cy="2679659"/>
+            <a:off x="4253333" y="1781890"/>
+            <a:ext cx="349666" cy="2675311"/>
           </a:xfrm>
           <a:prstGeom prst="bentConnector3">
             <a:avLst/>
@@ -7809,13 +7995,13 @@
         </p:spPr>
         <p:style>
           <a:lnRef idx="1">
-            <a:schemeClr val="accent1"/>
+            <a:schemeClr val="accent5"/>
           </a:lnRef>
           <a:fillRef idx="0">
-            <a:schemeClr val="accent1"/>
+            <a:schemeClr val="accent5"/>
           </a:fillRef>
           <a:effectRef idx="0">
-            <a:schemeClr val="accent1"/>
+            <a:schemeClr val="accent5"/>
           </a:effectRef>
           <a:fontRef idx="minor">
             <a:schemeClr val="tx1"/>
@@ -7824,24 +8010,24 @@
       </p:cxnSp>
       <p:cxnSp>
         <p:nvCxnSpPr>
-          <p:cNvPr id="42" name="连接符: 肘形 41">
+          <p:cNvPr id="23" name="连接符: 肘形 22">
             <a:extLst>
               <a:ext uri="{FF2B5EF4-FFF2-40B4-BE49-F238E27FC236}">
-                <a16:creationId xmlns:a16="http://schemas.microsoft.com/office/drawing/2014/main" id="{AB7CDEE0-B1C4-DFD8-A471-A9C2BF102A0A}"/>
+                <a16:creationId xmlns:a16="http://schemas.microsoft.com/office/drawing/2014/main" id="{00D749CF-C274-0054-2ACD-0E5C9F0D1DE1}"/>
               </a:ext>
             </a:extLst>
           </p:cNvPr>
           <p:cNvCxnSpPr>
             <a:cxnSpLocks/>
-            <a:stCxn id="10" idx="2"/>
-            <a:endCxn id="20" idx="0"/>
+            <a:stCxn id="8" idx="2"/>
+            <a:endCxn id="12" idx="0"/>
           </p:cNvCxnSpPr>
           <p:nvPr/>
         </p:nvCxnSpPr>
         <p:spPr>
           <a:xfrm rot="5400000">
-            <a:off x="5114979" y="2524888"/>
-            <a:ext cx="378356" cy="932024"/>
+            <a:off x="5130325" y="2652532"/>
+            <a:ext cx="343316" cy="927676"/>
           </a:xfrm>
           <a:prstGeom prst="bentConnector3">
             <a:avLst/>
@@ -7852,13 +8038,13 @@
         </p:spPr>
         <p:style>
           <a:lnRef idx="1">
-            <a:schemeClr val="accent1"/>
+            <a:schemeClr val="accent5"/>
           </a:lnRef>
           <a:fillRef idx="0">
-            <a:schemeClr val="accent1"/>
+            <a:schemeClr val="accent5"/>
           </a:fillRef>
           <a:effectRef idx="0">
-            <a:schemeClr val="accent1"/>
+            <a:schemeClr val="accent5"/>
           </a:effectRef>
           <a:fontRef idx="minor">
             <a:schemeClr val="tx1"/>
@@ -7867,24 +8053,24 @@
       </p:cxnSp>
       <p:cxnSp>
         <p:nvCxnSpPr>
-          <p:cNvPr id="47" name="连接符: 肘形 46">
+          <p:cNvPr id="24" name="连接符: 肘形 23">
             <a:extLst>
               <a:ext uri="{FF2B5EF4-FFF2-40B4-BE49-F238E27FC236}">
-                <a16:creationId xmlns:a16="http://schemas.microsoft.com/office/drawing/2014/main" id="{921B047C-9D3E-D502-8D92-CC02C64DBDE3}"/>
+                <a16:creationId xmlns:a16="http://schemas.microsoft.com/office/drawing/2014/main" id="{03C7C774-7BD3-14EB-7B28-528B89100A09}"/>
               </a:ext>
             </a:extLst>
           </p:cNvPr>
           <p:cNvCxnSpPr>
             <a:cxnSpLocks/>
-            <a:stCxn id="22" idx="2"/>
-            <a:endCxn id="24" idx="0"/>
+            <a:stCxn id="13" idx="2"/>
+            <a:endCxn id="14" idx="0"/>
           </p:cNvCxnSpPr>
           <p:nvPr/>
         </p:nvCxnSpPr>
         <p:spPr>
           <a:xfrm rot="5400000">
-            <a:off x="7803379" y="3516476"/>
-            <a:ext cx="305399" cy="831946"/>
+            <a:off x="8237315" y="4026612"/>
+            <a:ext cx="267299" cy="2174"/>
           </a:xfrm>
           <a:prstGeom prst="bentConnector3">
             <a:avLst/>
@@ -7895,13 +8081,13 @@
         </p:spPr>
         <p:style>
           <a:lnRef idx="1">
-            <a:schemeClr val="accent1"/>
+            <a:schemeClr val="accent5"/>
           </a:lnRef>
           <a:fillRef idx="0">
-            <a:schemeClr val="accent1"/>
+            <a:schemeClr val="accent5"/>
           </a:fillRef>
           <a:effectRef idx="0">
-            <a:schemeClr val="accent1"/>
+            <a:schemeClr val="accent5"/>
           </a:effectRef>
           <a:fontRef idx="minor">
             <a:schemeClr val="tx1"/>
@@ -7910,23 +8096,24 @@
       </p:cxnSp>
       <p:cxnSp>
         <p:nvCxnSpPr>
-          <p:cNvPr id="67" name="连接符: 肘形 66">
+          <p:cNvPr id="25" name="连接符: 肘形 24">
             <a:extLst>
               <a:ext uri="{FF2B5EF4-FFF2-40B4-BE49-F238E27FC236}">
-                <a16:creationId xmlns:a16="http://schemas.microsoft.com/office/drawing/2014/main" id="{0151ED38-E618-2556-DDD1-AAB978F776E7}"/>
+                <a16:creationId xmlns:a16="http://schemas.microsoft.com/office/drawing/2014/main" id="{E62E6834-EAAF-FEF3-5299-F395BAE4475F}"/>
               </a:ext>
             </a:extLst>
           </p:cNvPr>
           <p:cNvCxnSpPr>
-            <a:stCxn id="24" idx="2"/>
-            <a:endCxn id="26" idx="0"/>
+            <a:cxnSpLocks/>
+            <a:stCxn id="14" idx="2"/>
+            <a:endCxn id="15" idx="0"/>
           </p:cNvCxnSpPr>
           <p:nvPr/>
         </p:nvCxnSpPr>
         <p:spPr>
           <a:xfrm rot="5400000">
-            <a:off x="6247113" y="3749621"/>
-            <a:ext cx="357792" cy="2228193"/>
+            <a:off x="6696924" y="3376010"/>
+            <a:ext cx="287942" cy="3057965"/>
           </a:xfrm>
           <a:prstGeom prst="bentConnector3">
             <a:avLst/>
@@ -7937,13 +8124,13 @@
         </p:spPr>
         <p:style>
           <a:lnRef idx="1">
-            <a:schemeClr val="accent1"/>
+            <a:schemeClr val="accent5"/>
           </a:lnRef>
           <a:fillRef idx="0">
-            <a:schemeClr val="accent1"/>
+            <a:schemeClr val="accent5"/>
           </a:fillRef>
           <a:effectRef idx="0">
-            <a:schemeClr val="accent1"/>
+            <a:schemeClr val="accent5"/>
           </a:effectRef>
           <a:fontRef idx="minor">
             <a:schemeClr val="tx1"/>
@@ -7952,23 +8139,24 @@
       </p:cxnSp>
       <p:cxnSp>
         <p:nvCxnSpPr>
-          <p:cNvPr id="69" name="连接符: 肘形 68">
+          <p:cNvPr id="26" name="连接符: 肘形 25">
             <a:extLst>
               <a:ext uri="{FF2B5EF4-FFF2-40B4-BE49-F238E27FC236}">
-                <a16:creationId xmlns:a16="http://schemas.microsoft.com/office/drawing/2014/main" id="{4F6DBD17-15CA-32DE-238D-C933E588299D}"/>
+                <a16:creationId xmlns:a16="http://schemas.microsoft.com/office/drawing/2014/main" id="{8931BA59-A752-11A5-C488-E02F4BE87B93}"/>
               </a:ext>
             </a:extLst>
           </p:cNvPr>
           <p:cNvCxnSpPr>
-            <a:stCxn id="24" idx="2"/>
-            <a:endCxn id="28" idx="0"/>
+            <a:cxnSpLocks/>
+            <a:stCxn id="14" idx="2"/>
+            <a:endCxn id="16" idx="0"/>
           </p:cNvCxnSpPr>
           <p:nvPr/>
         </p:nvCxnSpPr>
         <p:spPr>
           <a:xfrm rot="5400000">
-            <a:off x="7361338" y="4863588"/>
-            <a:ext cx="357534" cy="1"/>
+            <a:off x="7814324" y="4486802"/>
+            <a:ext cx="281334" cy="829773"/>
           </a:xfrm>
           <a:prstGeom prst="bentConnector3">
             <a:avLst/>
@@ -7979,13 +8167,13 @@
         </p:spPr>
         <p:style>
           <a:lnRef idx="1">
-            <a:schemeClr val="accent1"/>
+            <a:schemeClr val="accent5"/>
           </a:lnRef>
           <a:fillRef idx="0">
-            <a:schemeClr val="accent1"/>
+            <a:schemeClr val="accent5"/>
           </a:fillRef>
           <a:effectRef idx="0">
-            <a:schemeClr val="accent1"/>
+            <a:schemeClr val="accent5"/>
           </a:effectRef>
           <a:fontRef idx="minor">
             <a:schemeClr val="tx1"/>
@@ -7994,23 +8182,24 @@
       </p:cxnSp>
       <p:cxnSp>
         <p:nvCxnSpPr>
-          <p:cNvPr id="71" name="连接符: 肘形 70">
+          <p:cNvPr id="27" name="连接符: 肘形 26">
             <a:extLst>
               <a:ext uri="{FF2B5EF4-FFF2-40B4-BE49-F238E27FC236}">
-                <a16:creationId xmlns:a16="http://schemas.microsoft.com/office/drawing/2014/main" id="{AF2A0144-368F-8DA1-16AA-9449D06368F4}"/>
+                <a16:creationId xmlns:a16="http://schemas.microsoft.com/office/drawing/2014/main" id="{F7A96E5B-6763-DE6D-1FE0-8E911721DC86}"/>
               </a:ext>
             </a:extLst>
           </p:cNvPr>
           <p:cNvCxnSpPr>
-            <a:stCxn id="24" idx="2"/>
-            <a:endCxn id="30" idx="0"/>
+            <a:cxnSpLocks/>
+            <a:stCxn id="14" idx="2"/>
+            <a:endCxn id="17" idx="0"/>
           </p:cNvCxnSpPr>
           <p:nvPr/>
         </p:nvCxnSpPr>
         <p:spPr>
           <a:xfrm rot="16200000" flipH="1">
-            <a:off x="8386149" y="3838776"/>
-            <a:ext cx="361724" cy="2053813"/>
+            <a:off x="8839135" y="4291762"/>
+            <a:ext cx="285524" cy="1224041"/>
           </a:xfrm>
           <a:prstGeom prst="bentConnector3">
             <a:avLst/>
@@ -8021,13 +8210,13 @@
         </p:spPr>
         <p:style>
           <a:lnRef idx="1">
-            <a:schemeClr val="accent1"/>
+            <a:schemeClr val="accent5"/>
           </a:lnRef>
           <a:fillRef idx="0">
-            <a:schemeClr val="accent1"/>
+            <a:schemeClr val="accent5"/>
           </a:fillRef>
           <a:effectRef idx="0">
-            <a:schemeClr val="accent1"/>
+            <a:schemeClr val="accent5"/>
           </a:effectRef>
           <a:fontRef idx="minor">
             <a:schemeClr val="tx1"/>
@@ -8036,21 +8225,21 @@
       </p:cxnSp>
       <p:cxnSp>
         <p:nvCxnSpPr>
-          <p:cNvPr id="73" name="直接箭头连接符 72">
+          <p:cNvPr id="28" name="直接箭头连接符 27">
             <a:extLst>
               <a:ext uri="{FF2B5EF4-FFF2-40B4-BE49-F238E27FC236}">
-                <a16:creationId xmlns:a16="http://schemas.microsoft.com/office/drawing/2014/main" id="{40DFE990-BDFF-5555-4EA4-F99A5AE5BE14}"/>
+                <a16:creationId xmlns:a16="http://schemas.microsoft.com/office/drawing/2014/main" id="{88D2C826-C0DE-604A-D9E1-5DC2998C395E}"/>
               </a:ext>
             </a:extLst>
           </p:cNvPr>
           <p:cNvCxnSpPr>
-            <a:stCxn id="26" idx="2"/>
+            <a:stCxn id="15" idx="2"/>
           </p:cNvCxnSpPr>
           <p:nvPr/>
         </p:nvCxnSpPr>
         <p:spPr>
           <a:xfrm>
-            <a:off x="5311912" y="5642285"/>
+            <a:off x="5311912" y="5648635"/>
             <a:ext cx="0" cy="260399"/>
           </a:xfrm>
           <a:prstGeom prst="straightConnector1">
@@ -8062,13 +8251,13 @@
         </p:spPr>
         <p:style>
           <a:lnRef idx="1">
-            <a:schemeClr val="accent1"/>
+            <a:schemeClr val="accent5"/>
           </a:lnRef>
           <a:fillRef idx="0">
-            <a:schemeClr val="accent1"/>
+            <a:schemeClr val="accent5"/>
           </a:fillRef>
           <a:effectRef idx="0">
-            <a:schemeClr val="accent1"/>
+            <a:schemeClr val="accent5"/>
           </a:effectRef>
           <a:fontRef idx="minor">
             <a:schemeClr val="tx1"/>
@@ -8077,15 +8266,15 @@
       </p:cxnSp>
       <p:cxnSp>
         <p:nvCxnSpPr>
-          <p:cNvPr id="75" name="直接箭头连接符 74">
+          <p:cNvPr id="29" name="直接箭头连接符 28">
             <a:extLst>
               <a:ext uri="{FF2B5EF4-FFF2-40B4-BE49-F238E27FC236}">
-                <a16:creationId xmlns:a16="http://schemas.microsoft.com/office/drawing/2014/main" id="{ADAE470D-E769-CB04-F4D4-3AB0BB800576}"/>
+                <a16:creationId xmlns:a16="http://schemas.microsoft.com/office/drawing/2014/main" id="{D8F7EB5E-9674-1E48-24EF-6303E52EA294}"/>
               </a:ext>
             </a:extLst>
           </p:cNvPr>
           <p:cNvCxnSpPr>
-            <a:stCxn id="28" idx="2"/>
+            <a:stCxn id="16" idx="2"/>
           </p:cNvCxnSpPr>
           <p:nvPr/>
         </p:nvCxnSpPr>
@@ -8103,13 +8292,13 @@
         </p:spPr>
         <p:style>
           <a:lnRef idx="1">
-            <a:schemeClr val="accent1"/>
+            <a:schemeClr val="accent4"/>
           </a:lnRef>
           <a:fillRef idx="0">
-            <a:schemeClr val="accent1"/>
+            <a:schemeClr val="accent4"/>
           </a:fillRef>
           <a:effectRef idx="0">
-            <a:schemeClr val="accent1"/>
+            <a:schemeClr val="accent4"/>
           </a:effectRef>
           <a:fontRef idx="minor">
             <a:schemeClr val="tx1"/>
@@ -8118,15 +8307,15 @@
       </p:cxnSp>
       <p:cxnSp>
         <p:nvCxnSpPr>
-          <p:cNvPr id="77" name="直接箭头连接符 76">
+          <p:cNvPr id="30" name="直接箭头连接符 29">
             <a:extLst>
               <a:ext uri="{FF2B5EF4-FFF2-40B4-BE49-F238E27FC236}">
-                <a16:creationId xmlns:a16="http://schemas.microsoft.com/office/drawing/2014/main" id="{4C66F402-DEE8-2ABB-1D74-8A1EB3FBA3B4}"/>
+                <a16:creationId xmlns:a16="http://schemas.microsoft.com/office/drawing/2014/main" id="{40BFD1DF-ED6B-388A-6F8C-5B93407DD9CC}"/>
               </a:ext>
             </a:extLst>
           </p:cNvPr>
           <p:cNvCxnSpPr>
-            <a:stCxn id="30" idx="2"/>
+            <a:stCxn id="17" idx="2"/>
           </p:cNvCxnSpPr>
           <p:nvPr/>
         </p:nvCxnSpPr>
@@ -8144,13 +8333,13 @@
         </p:spPr>
         <p:style>
           <a:lnRef idx="1">
-            <a:schemeClr val="accent1"/>
+            <a:schemeClr val="accent4"/>
           </a:lnRef>
           <a:fillRef idx="0">
-            <a:schemeClr val="accent1"/>
+            <a:schemeClr val="accent4"/>
           </a:fillRef>
           <a:effectRef idx="0">
-            <a:schemeClr val="accent1"/>
+            <a:schemeClr val="accent4"/>
           </a:effectRef>
           <a:fontRef idx="minor">
             <a:schemeClr val="tx1"/>
@@ -8159,10 +8348,10 @@
       </p:cxnSp>
       <p:sp>
         <p:nvSpPr>
-          <p:cNvPr id="81" name="文本框 80">
+          <p:cNvPr id="31" name="文本框 30">
             <a:extLst>
               <a:ext uri="{FF2B5EF4-FFF2-40B4-BE49-F238E27FC236}">
-                <a16:creationId xmlns:a16="http://schemas.microsoft.com/office/drawing/2014/main" id="{555DCF55-F7FA-2E4E-1620-B45E83C3B120}"/>
+                <a16:creationId xmlns:a16="http://schemas.microsoft.com/office/drawing/2014/main" id="{D87416E6-ED9E-8D3B-10D7-008E2B504426}"/>
               </a:ext>
             </a:extLst>
           </p:cNvPr>
@@ -8171,7 +8360,7 @@
         </p:nvSpPr>
         <p:spPr>
           <a:xfrm>
-            <a:off x="729880" y="4162072"/>
+            <a:off x="729880" y="4574822"/>
             <a:ext cx="3396160" cy="1107996"/>
           </a:xfrm>
           <a:prstGeom prst="rect">
@@ -8366,7 +8555,7 @@
     </p:spTree>
     <p:extLst>
       <p:ext uri="{BB962C8B-B14F-4D97-AF65-F5344CB8AC3E}">
-        <p14:creationId xmlns:p14="http://schemas.microsoft.com/office/powerpoint/2010/main" val="1093370905"/>
+        <p14:creationId xmlns:p14="http://schemas.microsoft.com/office/powerpoint/2010/main" val="2205288156"/>
       </p:ext>
     </p:extLst>
   </p:cSld>
@@ -9759,14 +9948,70 @@
             <a:pPr lvl="1"/>
             <a:r>
               <a:rPr lang="zh-CN" altLang="zh-CN" dirty="0"/>
-              <a:t>Trigger 打分：精确 1.0 → startsWith 0.8 → contains 0.6</a:t>
+              <a:t>Trigger 打分：精确 1.0 </a:t>
+            </a:r>
+            <a:r>
+              <a:rPr lang="zh-CN" altLang="zh-CN" dirty="0">
+                <a:solidFill>
+                  <a:schemeClr val="accent6">
+                    <a:lumMod val="75000"/>
+                  </a:schemeClr>
+                </a:solidFill>
+              </a:rPr>
+              <a:t>→</a:t>
+            </a:r>
+            <a:r>
+              <a:rPr lang="zh-CN" altLang="zh-CN" dirty="0"/>
+              <a:t> startsWith 0.8 </a:t>
+            </a:r>
+            <a:r>
+              <a:rPr lang="zh-CN" altLang="zh-CN" dirty="0">
+                <a:solidFill>
+                  <a:schemeClr val="accent6">
+                    <a:lumMod val="75000"/>
+                  </a:schemeClr>
+                </a:solidFill>
+              </a:rPr>
+              <a:t>→</a:t>
+            </a:r>
+            <a:r>
+              <a:rPr lang="zh-CN" altLang="zh-CN" dirty="0"/>
+              <a:t> contains 0.6</a:t>
             </a:r>
           </a:p>
           <a:p>
             <a:pPr lvl="1"/>
             <a:r>
               <a:rPr lang="zh-CN" altLang="zh-CN" dirty="0"/>
-              <a:t>可见性控制：PUBLIC / TENANT / PRIVATE 三级</a:t>
+              <a:t>可见性控制：PUBLIC </a:t>
+            </a:r>
+            <a:r>
+              <a:rPr lang="zh-CN" altLang="zh-CN" dirty="0">
+                <a:solidFill>
+                  <a:schemeClr val="accent6">
+                    <a:lumMod val="75000"/>
+                  </a:schemeClr>
+                </a:solidFill>
+              </a:rPr>
+              <a:t>/</a:t>
+            </a:r>
+            <a:r>
+              <a:rPr lang="zh-CN" altLang="zh-CN" dirty="0"/>
+              <a:t> TENANT </a:t>
+            </a:r>
+            <a:r>
+              <a:rPr lang="zh-CN" altLang="zh-CN" dirty="0">
+                <a:solidFill>
+                  <a:schemeClr val="accent6">
+                    <a:lumMod val="75000"/>
+                  </a:schemeClr>
+                </a:solidFill>
+              </a:rPr>
+              <a:t>/</a:t>
+            </a:r>
+            <a:r>
+              <a:rPr lang="zh-CN" altLang="zh-CN" dirty="0"/>
+              <a:t> PRIVATE 三级</a:t>
             </a:r>
           </a:p>
           <a:p>

--- a/GOAI_MxsDoc_AI_方案PPT.pptx
+++ b/GOAI_MxsDoc_AI_方案PPT.pptx
@@ -19,7 +19,7 @@
     <p:sldId id="267" r:id="rId13"/>
     <p:sldId id="268" r:id="rId14"/>
     <p:sldId id="269" r:id="rId15"/>
-    <p:sldId id="270" r:id="rId16"/>
+    <p:sldId id="272" r:id="rId16"/>
   </p:sldIdLst>
   <p:sldSz cx="12192000" cy="6858000"/>
   <p:notesSz cx="6858000" cy="9144000"/>
@@ -3085,7 +3085,7 @@
                   </a:schemeClr>
                 </a:solidFill>
               </a:rPr>
-              <a:t>新智基座（Agent Infra） | 个人参赛</a:t>
+              <a:t>新智基座（Agent Infra）</a:t>
             </a:r>
           </a:p>
           <a:p>
@@ -3291,14 +3291,32 @@
               </a:lnSpc>
             </a:pPr>
             <a:r>
-              <a:rPr lang="zh-CN" altLang="zh-CN" b="1" dirty="0"/>
+              <a:rPr lang="zh-CN" altLang="zh-CN" b="1" dirty="0">
+                <a:solidFill>
+                  <a:schemeClr val="bg2">
+                    <a:lumMod val="50000"/>
+                  </a:schemeClr>
+                </a:solidFill>
+              </a:rPr>
               <a:t>写操作审批闭环</a:t>
             </a:r>
             <a:r>
-              <a:rPr lang="zh-CN" altLang="zh-CN" dirty="0"/>
+              <a:rPr lang="zh-CN" altLang="zh-CN" dirty="0">
+                <a:solidFill>
+                  <a:schemeClr val="bg2">
+                    <a:lumMod val="50000"/>
+                  </a:schemeClr>
+                </a:solidFill>
+              </a:rPr>
               <a:t>：</a:t>
             </a:r>
-            <a:endParaRPr lang="en-US" altLang="zh-CN" dirty="0"/>
+            <a:endParaRPr lang="en-US" altLang="zh-CN" dirty="0">
+              <a:solidFill>
+                <a:schemeClr val="bg2">
+                  <a:lumMod val="50000"/>
+                </a:schemeClr>
+              </a:solidFill>
+            </a:endParaRPr>
           </a:p>
           <a:p>
             <a:pPr>
@@ -3384,40 +3402,82 @@
               </a:lnSpc>
             </a:pPr>
             <a:r>
-              <a:rPr lang="zh-CN" altLang="zh-CN" b="1" dirty="0"/>
+              <a:rPr lang="zh-CN" altLang="zh-CN" b="1" dirty="0">
+                <a:solidFill>
+                  <a:schemeClr val="bg2">
+                    <a:lumMod val="50000"/>
+                  </a:schemeClr>
+                </a:solidFill>
+              </a:rPr>
               <a:t>审计与脱敏</a:t>
             </a:r>
             <a:r>
-              <a:rPr lang="zh-CN" altLang="zh-CN" dirty="0"/>
+              <a:rPr lang="zh-CN" altLang="zh-CN" dirty="0">
+                <a:solidFill>
+                  <a:schemeClr val="bg2">
+                    <a:lumMod val="50000"/>
+                  </a:schemeClr>
+                </a:solidFill>
+              </a:rPr>
               <a:t>：</a:t>
             </a:r>
-            <a:endParaRPr lang="en-US" altLang="zh-CN" dirty="0"/>
+            <a:endParaRPr lang="en-US" altLang="zh-CN" dirty="0">
+              <a:solidFill>
+                <a:schemeClr val="bg2">
+                  <a:lumMod val="50000"/>
+                </a:schemeClr>
+              </a:solidFill>
+            </a:endParaRPr>
           </a:p>
           <a:p>
             <a:pPr lvl="1"/>
             <a:r>
-              <a:rPr lang="zh-CN" altLang="zh-CN" dirty="0"/>
+              <a:rPr lang="zh-CN" altLang="zh-CN" dirty="0">
+                <a:solidFill>
+                  <a:schemeClr val="bg2">
+                    <a:lumMod val="50000"/>
+                  </a:schemeClr>
+                </a:solidFill>
+              </a:rPr>
               <a:t>仅审计写操作（降低存储与性能开销）</a:t>
             </a:r>
           </a:p>
           <a:p>
             <a:pPr lvl="1"/>
             <a:r>
-              <a:rPr lang="zh-CN" altLang="zh-CN" dirty="0"/>
+              <a:rPr lang="zh-CN" altLang="zh-CN" dirty="0">
+                <a:solidFill>
+                  <a:schemeClr val="bg2">
+                    <a:lumMod val="50000"/>
+                  </a:schemeClr>
+                </a:solidFill>
+              </a:rPr>
               <a:t>敏感字段（password / token / cookie / content …）SHA-256 哈希或 [REDACTED]</a:t>
             </a:r>
           </a:p>
           <a:p>
             <a:pPr lvl="1"/>
             <a:r>
-              <a:rPr lang="zh-CN" altLang="zh-CN" dirty="0"/>
+              <a:rPr lang="zh-CN" altLang="zh-CN" dirty="0">
+                <a:solidFill>
+                  <a:schemeClr val="bg2">
+                    <a:lumMod val="50000"/>
+                  </a:schemeClr>
+                </a:solidFill>
+              </a:rPr>
               <a:t>审计状态机：PENDING → APPROVED/REJECTED → COMPLETED/FAILED</a:t>
             </a:r>
           </a:p>
           <a:p>
             <a:pPr lvl="1"/>
             <a:r>
-              <a:rPr lang="zh-CN" altLang="zh-CN" dirty="0"/>
+              <a:rPr lang="zh-CN" altLang="zh-CN" dirty="0">
+                <a:solidFill>
+                  <a:schemeClr val="bg2">
+                    <a:lumMod val="50000"/>
+                  </a:schemeClr>
+                </a:solidFill>
+              </a:rPr>
               <a:t>Step 审计：每步工具调用记录 [ToolUseLoop][STEP] 结构化日志（sessionId / requestId / turn / tool / args / success / durationMs）</a:t>
             </a:r>
             <a:endParaRPr lang="zh-CN" altLang="zh-CN" sz="1400" dirty="0">
@@ -3430,59 +3490,131 @@
           </a:p>
           <a:p>
             <a:r>
-              <a:rPr lang="zh-CN" altLang="zh-CN" b="1" dirty="0"/>
+              <a:rPr lang="zh-CN" altLang="zh-CN" b="1" dirty="0">
+                <a:solidFill>
+                  <a:schemeClr val="bg2">
+                    <a:lumMod val="50000"/>
+                  </a:schemeClr>
+                </a:solidFill>
+              </a:rPr>
               <a:t>限流保护</a:t>
             </a:r>
             <a:r>
-              <a:rPr lang="zh-CN" altLang="zh-CN" dirty="0"/>
+              <a:rPr lang="zh-CN" altLang="zh-CN" dirty="0">
+                <a:solidFill>
+                  <a:schemeClr val="bg2">
+                    <a:lumMod val="50000"/>
+                  </a:schemeClr>
+                </a:solidFill>
+              </a:rPr>
               <a:t>：</a:t>
             </a:r>
-            <a:endParaRPr lang="en-US" altLang="zh-CN" dirty="0"/>
+            <a:endParaRPr lang="en-US" altLang="zh-CN" dirty="0">
+              <a:solidFill>
+                <a:schemeClr val="bg2">
+                  <a:lumMod val="50000"/>
+                </a:schemeClr>
+              </a:solidFill>
+            </a:endParaRPr>
           </a:p>
           <a:p>
             <a:pPr lvl="1"/>
             <a:r>
-              <a:rPr lang="zh-CN" altLang="zh-CN" dirty="0"/>
+              <a:rPr lang="zh-CN" altLang="zh-CN" dirty="0">
+                <a:solidFill>
+                  <a:schemeClr val="bg2">
+                    <a:lumMod val="50000"/>
+                  </a:schemeClr>
+                </a:solidFill>
+              </a:rPr>
               <a:t>Bucket4j 令牌桶：per-IP / per-API-key 独立限流</a:t>
             </a:r>
           </a:p>
           <a:p>
             <a:pPr lvl="1"/>
             <a:r>
-              <a:rPr lang="zh-CN" altLang="zh-CN" dirty="0"/>
+              <a:rPr lang="zh-CN" altLang="zh-CN" dirty="0">
+                <a:solidFill>
+                  <a:schemeClr val="bg2">
+                    <a:lumMod val="50000"/>
+                  </a:schemeClr>
+                </a:solidFill>
+              </a:rPr>
               <a:t>每 IP 并发 SSE 连接限制</a:t>
             </a:r>
           </a:p>
           <a:p>
             <a:pPr lvl="1"/>
             <a:r>
-              <a:rPr lang="zh-CN" altLang="zh-CN" dirty="0"/>
+              <a:rPr lang="zh-CN" altLang="zh-CN" dirty="0">
+                <a:solidFill>
+                  <a:schemeClr val="bg2">
+                    <a:lumMod val="50000"/>
+                  </a:schemeClr>
+                </a:solidFill>
+              </a:rPr>
               <a:t>超限返回 429 + Retry-After 头</a:t>
             </a:r>
-            <a:endParaRPr lang="en-US" altLang="zh-CN" dirty="0"/>
-          </a:p>
-          <a:p>
-            <a:r>
-              <a:rPr lang="zh-CN" altLang="zh-CN" b="1" dirty="0"/>
+            <a:endParaRPr lang="en-US" altLang="zh-CN" dirty="0">
+              <a:solidFill>
+                <a:schemeClr val="bg2">
+                  <a:lumMod val="50000"/>
+                </a:schemeClr>
+              </a:solidFill>
+            </a:endParaRPr>
+          </a:p>
+          <a:p>
+            <a:r>
+              <a:rPr lang="zh-CN" altLang="zh-CN" b="1" dirty="0">
+                <a:solidFill>
+                  <a:schemeClr val="bg2">
+                    <a:lumMod val="50000"/>
+                  </a:schemeClr>
+                </a:solidFill>
+              </a:rPr>
               <a:t>鉴权双模</a:t>
             </a:r>
             <a:r>
-              <a:rPr lang="zh-CN" altLang="zh-CN" dirty="0"/>
+              <a:rPr lang="zh-CN" altLang="zh-CN" dirty="0">
+                <a:solidFill>
+                  <a:schemeClr val="bg2">
+                    <a:lumMod val="50000"/>
+                  </a:schemeClr>
+                </a:solidFill>
+              </a:rPr>
               <a:t>：</a:t>
             </a:r>
-            <a:endParaRPr lang="en-US" altLang="zh-CN" dirty="0"/>
+            <a:endParaRPr lang="en-US" altLang="zh-CN" dirty="0">
+              <a:solidFill>
+                <a:schemeClr val="bg2">
+                  <a:lumMod val="50000"/>
+                </a:schemeClr>
+              </a:solidFill>
+            </a:endParaRPr>
           </a:p>
           <a:p>
             <a:pPr lvl="1"/>
             <a:r>
-              <a:rPr lang="zh-CN" altLang="zh-CN" dirty="0"/>
+              <a:rPr lang="zh-CN" altLang="zh-CN" dirty="0">
+                <a:solidFill>
+                  <a:schemeClr val="bg2">
+                    <a:lumMod val="50000"/>
+                  </a:schemeClr>
+                </a:solidFill>
+              </a:rPr>
               <a:t>同源：共享 MxsDoc HttpSession，免 API Key</a:t>
             </a:r>
           </a:p>
           <a:p>
             <a:pPr lvl="1"/>
             <a:r>
-              <a:rPr lang="zh-CN" altLang="zh-CN" dirty="0"/>
+              <a:rPr lang="zh-CN" altLang="zh-CN" dirty="0">
+                <a:solidFill>
+                  <a:schemeClr val="bg2">
+                    <a:lumMod val="50000"/>
+                  </a:schemeClr>
+                </a:solidFill>
+              </a:rPr>
               <a:t>对外：X-API-Key / Authorization: Bearer + 同源 session 双模</a:t>
             </a:r>
           </a:p>
@@ -3500,20 +3632,25 @@
               <a:buNone/>
             </a:pPr>
             <a:r>
-              <a:rPr lang="zh-CN" altLang="zh-CN" sz="2600" b="1" dirty="0"/>
+              <a:rPr lang="zh-CN" altLang="zh-CN" sz="2600" b="1" dirty="0">
+                <a:solidFill>
+                  <a:schemeClr val="bg2">
+                    <a:lumMod val="50000"/>
+                  </a:schemeClr>
+                </a:solidFill>
+              </a:rPr>
               <a:t>风险控制总结</a:t>
             </a:r>
             <a:r>
-              <a:rPr lang="zh-CN" altLang="zh-CN" sz="2600" dirty="0"/>
+              <a:rPr lang="zh-CN" altLang="zh-CN" sz="2600" dirty="0">
+                <a:solidFill>
+                  <a:schemeClr val="bg2">
+                    <a:lumMod val="50000"/>
+                  </a:schemeClr>
+                </a:solidFill>
+              </a:rPr>
               <a:t>：写操作不可绕过审批 → 不可跳过审计 → 不可突破限流 → 不可越权访问。</a:t>
             </a:r>
-            <a:endParaRPr lang="zh-CN" altLang="zh-CN" sz="2600" dirty="0">
-              <a:solidFill>
-                <a:schemeClr val="bg2">
-                  <a:lumMod val="50000"/>
-                </a:schemeClr>
-              </a:solidFill>
-            </a:endParaRPr>
           </a:p>
         </p:txBody>
       </p:sp>
@@ -4423,11 +4560,23 @@
               <a:defRPr sz="1800"/>
             </a:pPr>
             <a:r>
-              <a:rPr lang="zh-CN" altLang="en-US" sz="6200" b="1" dirty="0"/>
+              <a:rPr lang="zh-CN" altLang="en-US" sz="6200" b="1" dirty="0">
+                <a:solidFill>
+                  <a:schemeClr val="bg2">
+                    <a:lumMod val="50000"/>
+                  </a:schemeClr>
+                </a:solidFill>
+              </a:rPr>
               <a:t>经验记忆（真实运转）</a:t>
             </a:r>
             <a:r>
-              <a:rPr lang="zh-CN" altLang="en-US" dirty="0"/>
+              <a:rPr lang="zh-CN" altLang="en-US" dirty="0">
+                <a:solidFill>
+                  <a:schemeClr val="bg2">
+                    <a:lumMod val="50000"/>
+                  </a:schemeClr>
+                </a:solidFill>
+              </a:rPr>
               <a:t>：</a:t>
             </a:r>
           </a:p>
@@ -4584,18 +4733,42 @@
               <a:defRPr sz="1800"/>
             </a:pPr>
             <a:r>
-              <a:rPr lang="zh-CN" altLang="en-US" sz="6400" b="1" dirty="0"/>
+              <a:rPr lang="zh-CN" altLang="en-US" sz="6400" b="1" dirty="0">
+                <a:solidFill>
+                  <a:schemeClr val="bg2">
+                    <a:lumMod val="50000"/>
+                  </a:schemeClr>
+                </a:solidFill>
+              </a:rPr>
               <a:t>技能结晶（从经验到可复用 </a:t>
             </a:r>
             <a:r>
-              <a:rPr lang="en-US" altLang="zh-CN" sz="6400" b="1" dirty="0"/>
+              <a:rPr lang="en-US" altLang="zh-CN" sz="6400" b="1" dirty="0">
+                <a:solidFill>
+                  <a:schemeClr val="bg2">
+                    <a:lumMod val="50000"/>
+                  </a:schemeClr>
+                </a:solidFill>
+              </a:rPr>
               <a:t>Skill</a:t>
             </a:r>
             <a:r>
-              <a:rPr lang="zh-CN" altLang="en-US" sz="6400" b="1" dirty="0"/>
+              <a:rPr lang="zh-CN" altLang="en-US" sz="6400" b="1" dirty="0">
+                <a:solidFill>
+                  <a:schemeClr val="bg2">
+                    <a:lumMod val="50000"/>
+                  </a:schemeClr>
+                </a:solidFill>
+              </a:rPr>
               <a:t>）：</a:t>
             </a:r>
-            <a:endParaRPr lang="en-US" altLang="zh-CN" sz="6400" b="1" dirty="0"/>
+            <a:endParaRPr lang="en-US" altLang="zh-CN" sz="6400" b="1" dirty="0">
+              <a:solidFill>
+                <a:schemeClr val="bg2">
+                  <a:lumMod val="50000"/>
+                </a:schemeClr>
+              </a:solidFill>
+            </a:endParaRPr>
           </a:p>
           <a:p>
             <a:pPr lvl="1">
@@ -4933,7 +5106,13 @@
               <a:defRPr sz="1800"/>
             </a:pPr>
             <a:r>
-              <a:rPr lang="zh-CN" altLang="en-US" sz="6400" b="1" dirty="0"/>
+              <a:rPr lang="zh-CN" altLang="en-US" sz="6400" b="1" dirty="0">
+                <a:solidFill>
+                  <a:schemeClr val="bg2">
+                    <a:lumMod val="50000"/>
+                  </a:schemeClr>
+                </a:solidFill>
+              </a:rPr>
               <a:t>自诊断（持续健康监控）：</a:t>
             </a:r>
           </a:p>
@@ -5100,7 +5279,13 @@
               <a:defRPr sz="1800"/>
             </a:pPr>
             <a:r>
-              <a:rPr lang="zh-CN" altLang="en-US" sz="1400" b="1" dirty="0"/>
+              <a:rPr lang="zh-CN" altLang="en-US" sz="1400" b="1" dirty="0">
+                <a:solidFill>
+                  <a:schemeClr val="bg2">
+                    <a:lumMod val="50000"/>
+                  </a:schemeClr>
+                </a:solidFill>
+              </a:rPr>
               <a:t>已完成（初赛阶段）：</a:t>
             </a:r>
           </a:p>
@@ -5412,16 +5597,14 @@
               <a:defRPr sz="1800"/>
             </a:pPr>
             <a:r>
-              <a:rPr lang="zh-CN" altLang="en-US" sz="1400" b="1" dirty="0"/>
-              <a:t>复赛计划（</a:t>
-            </a:r>
-            <a:r>
-              <a:rPr lang="en-US" altLang="zh-CN" sz="1400" b="1" dirty="0"/>
-              <a:t>8.25–9.3</a:t>
-            </a:r>
-            <a:r>
-              <a:rPr lang="zh-CN" altLang="en-US" sz="1400" b="1" dirty="0"/>
-              <a:t>）：</a:t>
+              <a:rPr lang="zh-CN" altLang="en-US" sz="1400" b="1" dirty="0">
+                <a:solidFill>
+                  <a:schemeClr val="bg2">
+                    <a:lumMod val="50000"/>
+                  </a:schemeClr>
+                </a:solidFill>
+              </a:rPr>
+              <a:t>复赛计划：</a:t>
             </a:r>
           </a:p>
           <a:p>
@@ -5655,7 +5838,7 @@
                   </a:schemeClr>
                 </a:solidFill>
               </a:rPr>
-              <a:t>现状</a:t>
+              <a:t>计划</a:t>
             </a:r>
             <a:endParaRPr lang="zh-CN" altLang="zh-CN" sz="4000" b="1" dirty="0">
               <a:solidFill>
@@ -5691,8 +5874,62 @@
           <a:lstStyle/>
           <a:p>
             <a:r>
+              <a:rPr lang="zh-CN" altLang="zh-CN" b="1" dirty="0">
+                <a:solidFill>
+                  <a:schemeClr val="bg2">
+                    <a:lumMod val="50000"/>
+                  </a:schemeClr>
+                </a:solidFill>
+              </a:rPr>
+              <a:t>项目已在 Gitee </a:t>
+            </a:r>
+            <a:r>
+              <a:rPr lang="zh-CN" altLang="en-US" b="1" dirty="0">
+                <a:solidFill>
+                  <a:schemeClr val="bg2">
+                    <a:lumMod val="50000"/>
+                  </a:schemeClr>
+                </a:solidFill>
+              </a:rPr>
+              <a:t>和</a:t>
+            </a:r>
+            <a:r>
+              <a:rPr lang="en-US" altLang="zh-CN" b="1" dirty="0">
+                <a:solidFill>
+                  <a:schemeClr val="bg2">
+                    <a:lumMod val="50000"/>
+                  </a:schemeClr>
+                </a:solidFill>
+              </a:rPr>
+              <a:t>GitHub</a:t>
+            </a:r>
+            <a:r>
+              <a:rPr lang="zh-CN" altLang="en-US" b="1" dirty="0">
+                <a:solidFill>
+                  <a:schemeClr val="bg2">
+                    <a:lumMod val="50000"/>
+                  </a:schemeClr>
+                </a:solidFill>
+              </a:rPr>
+              <a:t>上</a:t>
+            </a:r>
+            <a:r>
+              <a:rPr lang="zh-CN" altLang="zh-CN" b="1" dirty="0">
+                <a:solidFill>
+                  <a:schemeClr val="bg2">
+                    <a:lumMod val="50000"/>
+                  </a:schemeClr>
+                </a:solidFill>
+              </a:rPr>
+              <a:t>开源</a:t>
+            </a:r>
+            <a:r>
               <a:rPr lang="zh-CN" altLang="zh-CN" dirty="0"/>
-              <a:t>项目已在 Gitee 开源：</a:t>
+              <a:t>：</a:t>
+            </a:r>
+            <a:r>
+              <a:rPr lang="en-US" altLang="zh-CN" dirty="0"/>
+              <a:t>	</a:t>
             </a:r>
             <a:r>
               <a:rPr lang="zh-CN" altLang="zh-CN" u="sng" dirty="0">
@@ -5703,17 +5940,58 @@
             <a:endParaRPr lang="zh-CN" altLang="zh-CN" dirty="0"/>
           </a:p>
           <a:p>
-            <a:r>
-              <a:rPr lang="zh-CN" altLang="zh-CN" dirty="0"/>
+            <a:pPr marL="0" indent="0">
+              <a:buNone/>
+            </a:pPr>
+            <a:r>
+              <a:rPr lang="en-US" altLang="zh-CN" dirty="0"/>
+              <a:t>	</a:t>
+            </a:r>
+            <a:r>
+              <a:rPr lang="en-US" altLang="zh-CN" dirty="0">
+                <a:hlinkClick r:id="rId3"/>
+              </a:rPr>
+              <a:t>https://github.com/RainyGao-GitHub/DocSys</a:t>
+            </a:r>
+            <a:endParaRPr lang="en-US" altLang="zh-CN" dirty="0"/>
+          </a:p>
+          <a:p>
+            <a:r>
+              <a:rPr lang="zh-CN" altLang="zh-CN" b="1" dirty="0">
+                <a:solidFill>
+                  <a:schemeClr val="bg2">
+                    <a:lumMod val="50000"/>
+                  </a:schemeClr>
+                </a:solidFill>
+              </a:rPr>
               <a:t>许可证：GPL 2.0</a:t>
             </a:r>
-          </a:p>
-          <a:p>
-            <a:r>
-              <a:rPr lang="zh-CN" altLang="zh-CN" dirty="0"/>
+            <a:endParaRPr lang="en-US" altLang="zh-CN" b="1" dirty="0">
+              <a:solidFill>
+                <a:schemeClr val="bg2">
+                  <a:lumMod val="50000"/>
+                </a:schemeClr>
+              </a:solidFill>
+            </a:endParaRPr>
+          </a:p>
+          <a:p>
+            <a:r>
+              <a:rPr lang="zh-CN" altLang="zh-CN" b="1" dirty="0">
+                <a:solidFill>
+                  <a:schemeClr val="bg2">
+                    <a:lumMod val="50000"/>
+                  </a:schemeClr>
+                </a:solidFill>
+              </a:rPr>
               <a:t>Agent 模块完整源码在 src/com/DocSystem/agent/ 下</a:t>
             </a:r>
-            <a:endParaRPr lang="en-US" altLang="zh-CN" dirty="0"/>
+            <a:endParaRPr lang="en-US" altLang="zh-CN" b="1" dirty="0">
+              <a:solidFill>
+                <a:schemeClr val="bg2">
+                  <a:lumMod val="50000"/>
+                </a:schemeClr>
+              </a:solidFill>
+            </a:endParaRPr>
           </a:p>
         </p:txBody>
       </p:sp>
@@ -5738,7 +6016,7 @@
         <p:cNvPr id="1" name="">
           <a:extLst>
             <a:ext uri="{FF2B5EF4-FFF2-40B4-BE49-F238E27FC236}">
-              <a16:creationId xmlns:a16="http://schemas.microsoft.com/office/drawing/2014/main" id="{17BA41EB-F2AA-7F84-F09F-C2D214E5DB39}"/>
+              <a16:creationId xmlns:a16="http://schemas.microsoft.com/office/drawing/2014/main" id="{1CEBEABE-D080-29E2-5841-4BB099260846}"/>
             </a:ext>
           </a:extLst>
         </p:cNvPr>
@@ -5758,7 +6036,7 @@
           <p:cNvPr id="2" name="标题 1">
             <a:extLst>
               <a:ext uri="{FF2B5EF4-FFF2-40B4-BE49-F238E27FC236}">
-                <a16:creationId xmlns:a16="http://schemas.microsoft.com/office/drawing/2014/main" id="{297E0AF6-D26F-CFC3-9FAE-DD5ADA8B0FA8}"/>
+                <a16:creationId xmlns:a16="http://schemas.microsoft.com/office/drawing/2014/main" id="{F2F58D44-33D7-E1BE-4E62-59FADFCB9DC8}"/>
               </a:ext>
             </a:extLst>
           </p:cNvPr>
@@ -5783,6 +6061,7 @@
                     <a:lumMod val="75000"/>
                   </a:schemeClr>
                 </a:solidFill>
+                <a:latin typeface="+mj-ea"/>
               </a:rPr>
               <a:t>MXSDOC </a:t>
             </a:r>
@@ -5791,15 +6070,17 @@
                 <a:solidFill>
                   <a:srgbClr val="7030A0"/>
                 </a:solidFill>
+                <a:latin typeface="+mj-ea"/>
               </a:rPr>
               <a:t>AI</a:t>
             </a:r>
-            <a:endParaRPr lang="zh-CN" altLang="zh-CN" sz="2200" b="1" dirty="0">
+            <a:endParaRPr lang="zh-CN" altLang="zh-CN" sz="4000" b="1" dirty="0">
               <a:solidFill>
-                <a:schemeClr val="bg2">
-                  <a:lumMod val="50000"/>
+                <a:schemeClr val="accent4">
+                  <a:lumMod val="75000"/>
                 </a:schemeClr>
               </a:solidFill>
+              <a:latin typeface="+mj-ea"/>
             </a:endParaRPr>
           </a:p>
         </p:txBody>
@@ -5809,7 +6090,7 @@
           <p:cNvPr id="3" name="内容占位符 2">
             <a:extLst>
               <a:ext uri="{FF2B5EF4-FFF2-40B4-BE49-F238E27FC236}">
-                <a16:creationId xmlns:a16="http://schemas.microsoft.com/office/drawing/2014/main" id="{8491FDAD-1C53-3EF6-4D48-84C8EB61DAF7}"/>
+                <a16:creationId xmlns:a16="http://schemas.microsoft.com/office/drawing/2014/main" id="{9283942A-4831-CB9B-B826-8E4254406526}"/>
               </a:ext>
             </a:extLst>
           </p:cNvPr>
@@ -5820,12 +6101,7 @@
             <p:ph idx="1"/>
           </p:nvPr>
         </p:nvSpPr>
-        <p:spPr>
-          <a:xfrm>
-            <a:off x="893433" y="2141537"/>
-            <a:ext cx="10460367" cy="4351338"/>
-          </a:xfrm>
-        </p:spPr>
+        <p:spPr/>
         <p:txBody>
           <a:bodyPr>
             <a:normAutofit/>
@@ -5833,10 +6109,47 @@
           <a:lstStyle/>
           <a:p>
             <a:pPr marL="0" indent="0">
+              <a:lnSpc>
+                <a:spcPct val="100000"/>
+              </a:lnSpc>
               <a:buNone/>
             </a:pPr>
             <a:r>
-              <a:rPr lang="zh-CN" altLang="zh-CN" b="1" dirty="0">
+              <a:rPr lang="zh-CN" altLang="zh-CN" sz="4000" b="1" dirty="0">
+                <a:solidFill>
+                  <a:schemeClr val="accent5"/>
+                </a:solidFill>
+              </a:rPr>
+              <a:t>从文档系统出发，通向通用多 Agent 协同基座</a:t>
+            </a:r>
+            <a:endParaRPr lang="en-US" altLang="zh-CN" sz="4000" b="1" dirty="0">
+              <a:solidFill>
+                <a:schemeClr val="accent5"/>
+              </a:solidFill>
+            </a:endParaRPr>
+          </a:p>
+          <a:p>
+            <a:pPr marL="0" indent="0">
+              <a:lnSpc>
+                <a:spcPct val="100000"/>
+              </a:lnSpc>
+              <a:buNone/>
+            </a:pPr>
+            <a:endParaRPr lang="en-US" altLang="zh-CN" sz="4000" dirty="0">
+              <a:solidFill>
+                <a:schemeClr val="accent5"/>
+              </a:solidFill>
+            </a:endParaRPr>
+          </a:p>
+          <a:p>
+            <a:pPr marL="0" indent="0">
+              <a:lnSpc>
+                <a:spcPct val="100000"/>
+              </a:lnSpc>
+              <a:buNone/>
+            </a:pPr>
+            <a:r>
+              <a:rPr lang="zh-CN" altLang="zh-CN" sz="1800" b="1" dirty="0">
                 <a:solidFill>
                   <a:schemeClr val="accent4">
                     <a:lumMod val="75000"/>
@@ -5846,7 +6159,7 @@
               <a:t>MxsDoc </a:t>
             </a:r>
             <a:r>
-              <a:rPr lang="zh-CN" altLang="zh-CN" b="1" dirty="0">
+              <a:rPr lang="zh-CN" altLang="zh-CN" sz="1800" b="1" dirty="0">
                 <a:solidFill>
                   <a:srgbClr val="7030A0"/>
                 </a:solidFill>
@@ -5854,7 +6167,7 @@
               <a:t>AI </a:t>
             </a:r>
             <a:r>
-              <a:rPr lang="zh-CN" altLang="zh-CN" sz="2000" dirty="0">
+              <a:rPr lang="zh-CN" altLang="zh-CN" sz="1800" dirty="0">
                 <a:solidFill>
                   <a:schemeClr val="bg2">
                     <a:lumMod val="50000"/>
@@ -5864,57 +6177,47 @@
               <a:t>用一个真实运行的开源文档系统，证明多 Agent 能在企业生产环境里</a:t>
             </a:r>
             <a:r>
-              <a:rPr lang="zh-CN" altLang="zh-CN" sz="2000" b="1" dirty="0">
-                <a:solidFill>
-                  <a:schemeClr val="bg2">
-                    <a:lumMod val="50000"/>
-                  </a:schemeClr>
+              <a:rPr lang="zh-CN" altLang="zh-CN" sz="1800" b="1" dirty="0">
+                <a:solidFill>
+                  <a:schemeClr val="accent2"/>
                 </a:solidFill>
               </a:rPr>
               <a:t>可信</a:t>
             </a:r>
             <a:r>
-              <a:rPr lang="zh-CN" altLang="zh-CN" sz="2000" dirty="0">
-                <a:solidFill>
-                  <a:schemeClr val="bg2">
-                    <a:lumMod val="50000"/>
-                  </a:schemeClr>
+              <a:rPr lang="zh-CN" altLang="zh-CN" sz="1800" dirty="0">
+                <a:solidFill>
+                  <a:schemeClr val="accent2"/>
                 </a:solidFill>
               </a:rPr>
               <a:t>、</a:t>
             </a:r>
             <a:r>
-              <a:rPr lang="zh-CN" altLang="zh-CN" sz="2000" b="1" dirty="0">
-                <a:solidFill>
-                  <a:schemeClr val="bg2">
-                    <a:lumMod val="50000"/>
-                  </a:schemeClr>
+              <a:rPr lang="zh-CN" altLang="zh-CN" sz="1800" b="1" dirty="0">
+                <a:solidFill>
+                  <a:schemeClr val="accent2"/>
                 </a:solidFill>
               </a:rPr>
               <a:t>可控</a:t>
             </a:r>
             <a:r>
-              <a:rPr lang="zh-CN" altLang="zh-CN" sz="2000" dirty="0">
-                <a:solidFill>
-                  <a:schemeClr val="bg2">
-                    <a:lumMod val="50000"/>
-                  </a:schemeClr>
+              <a:rPr lang="zh-CN" altLang="zh-CN" sz="1800" dirty="0">
+                <a:solidFill>
+                  <a:schemeClr val="accent2"/>
                 </a:solidFill>
               </a:rPr>
               <a:t>、</a:t>
             </a:r>
             <a:r>
-              <a:rPr lang="zh-CN" altLang="zh-CN" sz="2000" b="1" dirty="0">
-                <a:solidFill>
-                  <a:schemeClr val="bg2">
-                    <a:lumMod val="50000"/>
-                  </a:schemeClr>
+              <a:rPr lang="zh-CN" altLang="zh-CN" sz="1800" b="1" dirty="0">
+                <a:solidFill>
+                  <a:schemeClr val="accent2"/>
                 </a:solidFill>
               </a:rPr>
               <a:t>可观测</a:t>
             </a:r>
             <a:r>
-              <a:rPr lang="zh-CN" altLang="zh-CN" sz="2000" dirty="0">
+              <a:rPr lang="zh-CN" altLang="zh-CN" sz="1800" dirty="0">
                 <a:solidFill>
                   <a:schemeClr val="bg2">
                     <a:lumMod val="50000"/>
@@ -5926,58 +6229,64 @@
           </a:p>
           <a:p>
             <a:pPr marL="0" indent="0">
+              <a:lnSpc>
+                <a:spcPct val="100000"/>
+              </a:lnSpc>
               <a:buNone/>
             </a:pPr>
-            <a:endParaRPr lang="en-US" altLang="zh-CN" dirty="0"/>
-          </a:p>
-        </p:txBody>
-      </p:sp>
-      <p:sp>
-        <p:nvSpPr>
-          <p:cNvPr id="5" name="文本框 4">
-            <a:extLst>
-              <a:ext uri="{FF2B5EF4-FFF2-40B4-BE49-F238E27FC236}">
-                <a16:creationId xmlns:a16="http://schemas.microsoft.com/office/drawing/2014/main" id="{2AF7A8FA-0135-98EC-9CD0-EB5590DB6BA0}"/>
-              </a:ext>
-            </a:extLst>
-          </p:cNvPr>
-          <p:cNvSpPr txBox="1"/>
-          <p:nvPr/>
-        </p:nvSpPr>
-        <p:spPr>
-          <a:xfrm>
-            <a:off x="838200" y="1331058"/>
-            <a:ext cx="6097022" cy="430887"/>
-          </a:xfrm>
-          <a:prstGeom prst="rect">
-            <a:avLst/>
-          </a:prstGeom>
-          <a:noFill/>
-        </p:spPr>
-        <p:txBody>
-          <a:bodyPr wrap="square">
-            <a:spAutoFit/>
-          </a:bodyPr>
-          <a:lstStyle/>
-          <a:p>
-            <a:r>
-              <a:rPr lang="zh-CN" altLang="zh-CN" sz="2200" dirty="0">
-                <a:solidFill>
-                  <a:schemeClr val="bg2">
-                    <a:lumMod val="50000"/>
-                  </a:schemeClr>
-                </a:solidFill>
-              </a:rPr>
-              <a:t>从文档系统出发，通向通用多 Agent 协同基座。</a:t>
-            </a:r>
-            <a:endParaRPr lang="zh-CN" altLang="en-US" dirty="0"/>
+            <a:endParaRPr lang="en-US" altLang="zh-CN" sz="4000" dirty="0">
+              <a:solidFill>
+                <a:schemeClr val="accent5"/>
+              </a:solidFill>
+            </a:endParaRPr>
+          </a:p>
+          <a:p>
+            <a:pPr marL="0" indent="0">
+              <a:lnSpc>
+                <a:spcPct val="100000"/>
+              </a:lnSpc>
+              <a:buNone/>
+            </a:pPr>
+            <a:endParaRPr lang="en-US" altLang="zh-CN" sz="4000" dirty="0">
+              <a:solidFill>
+                <a:schemeClr val="accent5"/>
+              </a:solidFill>
+            </a:endParaRPr>
+          </a:p>
+          <a:p>
+            <a:pPr marL="0" indent="0">
+              <a:lnSpc>
+                <a:spcPct val="100000"/>
+              </a:lnSpc>
+              <a:buNone/>
+            </a:pPr>
+            <a:endParaRPr lang="zh-CN" altLang="en-US" sz="4000" dirty="0">
+              <a:solidFill>
+                <a:schemeClr val="accent5"/>
+              </a:solidFill>
+            </a:endParaRPr>
+          </a:p>
+          <a:p>
+            <a:pPr marL="0" indent="0">
+              <a:lnSpc>
+                <a:spcPct val="100000"/>
+              </a:lnSpc>
+              <a:buNone/>
+            </a:pPr>
+            <a:endParaRPr lang="zh-CN" altLang="zh-CN" sz="1400" b="1" dirty="0">
+              <a:solidFill>
+                <a:schemeClr val="bg2">
+                  <a:lumMod val="50000"/>
+                </a:schemeClr>
+              </a:solidFill>
+            </a:endParaRPr>
           </a:p>
         </p:txBody>
       </p:sp>
     </p:spTree>
     <p:extLst>
       <p:ext uri="{BB962C8B-B14F-4D97-AF65-F5344CB8AC3E}">
-        <p14:creationId xmlns:p14="http://schemas.microsoft.com/office/powerpoint/2010/main" val="2411706522"/>
+        <p14:creationId xmlns:p14="http://schemas.microsoft.com/office/powerpoint/2010/main" val="464543857"/>
       </p:ext>
     </p:extLst>
   </p:cSld>
@@ -6059,7 +6368,7 @@
         <p:spPr/>
         <p:txBody>
           <a:bodyPr>
-            <a:normAutofit/>
+            <a:normAutofit fontScale="92500" lnSpcReduction="10000"/>
           </a:bodyPr>
           <a:lstStyle/>
           <a:p>
@@ -6210,6 +6519,76 @@
                 </a:solidFill>
               </a:rPr>
               <a:t>，写操作要可确认、可审计、可回溯。</a:t>
+            </a:r>
+            <a:endParaRPr lang="en-US" altLang="zh-CN" sz="1300" dirty="0">
+              <a:solidFill>
+                <a:schemeClr val="bg2">
+                  <a:lumMod val="50000"/>
+                </a:schemeClr>
+              </a:solidFill>
+            </a:endParaRPr>
+          </a:p>
+          <a:p>
+            <a:pPr lvl="0"/>
+            <a:r>
+              <a:rPr lang="en-US" altLang="zh-CN" sz="1300" dirty="0">
+                <a:solidFill>
+                  <a:schemeClr val="bg2">
+                    <a:lumMod val="50000"/>
+                  </a:schemeClr>
+                </a:solidFill>
+              </a:rPr>
+              <a:t>AI</a:t>
+            </a:r>
+            <a:r>
+              <a:rPr lang="zh-CN" altLang="en-US" sz="1300" dirty="0">
+                <a:solidFill>
+                  <a:schemeClr val="bg2">
+                    <a:lumMod val="50000"/>
+                  </a:schemeClr>
+                </a:solidFill>
+              </a:rPr>
+              <a:t>无法直接编辑</a:t>
+            </a:r>
+            <a:r>
+              <a:rPr lang="en-US" altLang="zh-CN" sz="1300" dirty="0">
+                <a:solidFill>
+                  <a:schemeClr val="bg2">
+                    <a:lumMod val="50000"/>
+                  </a:schemeClr>
+                </a:solidFill>
+              </a:rPr>
+              <a:t>Office</a:t>
+            </a:r>
+            <a:r>
+              <a:rPr lang="zh-CN" altLang="en-US" sz="1300" dirty="0">
+                <a:solidFill>
+                  <a:schemeClr val="bg2">
+                    <a:lumMod val="50000"/>
+                  </a:schemeClr>
+                </a:solidFill>
+              </a:rPr>
+              <a:t>文件（</a:t>
+            </a:r>
+            <a:r>
+              <a:rPr lang="en-US" altLang="zh-CN" sz="1300" dirty="0">
+                <a:solidFill>
+                  <a:schemeClr val="bg2">
+                    <a:lumMod val="50000"/>
+                  </a:schemeClr>
+                </a:solidFill>
+              </a:rPr>
+              <a:t>Word / PPT / Excel</a:t>
+            </a:r>
+            <a:r>
+              <a:rPr lang="zh-CN" altLang="en-US" sz="1300" dirty="0">
+                <a:solidFill>
+                  <a:schemeClr val="bg2">
+                    <a:lumMod val="50000"/>
+                  </a:schemeClr>
+                </a:solidFill>
+              </a:rPr>
+              <a:t>）</a:t>
             </a:r>
             <a:endParaRPr lang="en-US" altLang="zh-CN" sz="1300" dirty="0">
               <a:solidFill>
@@ -6239,7 +6618,7 @@
                   </a:schemeClr>
                 </a:solidFill>
               </a:rPr>
-              <a:t>具体场景（已在 MxsDoc 中运行）：</a:t>
+              <a:t>具体场景：</a:t>
             </a:r>
           </a:p>
           <a:p>
@@ -6255,8 +6634,9 @@
             </a:r>
           </a:p>
           <a:p>
-            <a:r>
-              <a:rPr lang="zh-CN" altLang="zh-CN" sz="1300" dirty="0">
+            <a:pPr lvl="1"/>
+            <a:r>
+              <a:rPr lang="zh-CN" altLang="zh-CN" sz="900" dirty="0">
                 <a:solidFill>
                   <a:schemeClr val="bg2">
                     <a:lumMod val="50000"/>
@@ -6267,8 +6647,9 @@
             </a:r>
           </a:p>
           <a:p>
-            <a:r>
-              <a:rPr lang="zh-CN" altLang="zh-CN" sz="1300" dirty="0">
+            <a:pPr lvl="1"/>
+            <a:r>
+              <a:rPr lang="zh-CN" altLang="zh-CN" sz="900" dirty="0">
                 <a:solidFill>
                   <a:schemeClr val="bg2">
                     <a:lumMod val="50000"/>
@@ -6277,6 +6658,62 @@
               </a:rPr>
               <a:t>例如：“在 DocSys 仓库中搜索 Kafka 相关文档并读取第一篇” → search_docs → get_doc → 总结内容（LLM 自主 3 步串联，实测通过）</a:t>
             </a:r>
+            <a:endParaRPr lang="en-US" altLang="zh-CN" sz="900" dirty="0">
+              <a:solidFill>
+                <a:schemeClr val="bg2">
+                  <a:lumMod val="50000"/>
+                </a:schemeClr>
+              </a:solidFill>
+            </a:endParaRPr>
+          </a:p>
+          <a:p>
+            <a:r>
+              <a:rPr lang="en-US" altLang="zh-CN" sz="1300" dirty="0">
+                <a:solidFill>
+                  <a:schemeClr val="bg2">
+                    <a:lumMod val="50000"/>
+                  </a:schemeClr>
+                </a:solidFill>
+              </a:rPr>
+              <a:t>AI</a:t>
+            </a:r>
+            <a:r>
+              <a:rPr lang="zh-CN" altLang="en-US" sz="1300" dirty="0">
+                <a:solidFill>
+                  <a:schemeClr val="bg2">
+                    <a:lumMod val="50000"/>
+                  </a:schemeClr>
+                </a:solidFill>
+              </a:rPr>
+              <a:t>直接参与</a:t>
+            </a:r>
+            <a:r>
+              <a:rPr lang="en-US" altLang="zh-CN" sz="1300" dirty="0">
+                <a:solidFill>
+                  <a:schemeClr val="bg2">
+                    <a:lumMod val="50000"/>
+                  </a:schemeClr>
+                </a:solidFill>
+              </a:rPr>
+              <a:t>Office</a:t>
+            </a:r>
+            <a:r>
+              <a:rPr lang="zh-CN" altLang="en-US" sz="1300" dirty="0">
+                <a:solidFill>
+                  <a:schemeClr val="bg2">
+                    <a:lumMod val="50000"/>
+                  </a:schemeClr>
+                </a:solidFill>
+              </a:rPr>
+              <a:t>文件的协同编辑</a:t>
+            </a:r>
+            <a:endParaRPr lang="zh-CN" altLang="zh-CN" sz="900" dirty="0">
+              <a:solidFill>
+                <a:schemeClr val="bg2">
+                  <a:lumMod val="50000"/>
+                </a:schemeClr>
+              </a:solidFill>
+            </a:endParaRPr>
           </a:p>
           <a:p>
             <a:pPr marL="0" indent="0">
@@ -6816,7 +7253,7 @@
         <p:spPr>
           <a:xfrm>
             <a:off x="4274061" y="2037910"/>
-            <a:ext cx="2971290" cy="223091"/>
+            <a:ext cx="2971290" cy="236041"/>
           </a:xfrm>
           <a:prstGeom prst="roundRect">
             <a:avLst/>
@@ -6911,7 +7348,33 @@
                   <a:schemeClr val="bg1"/>
                 </a:solidFill>
               </a:rPr>
-              <a:t>编排 Agent (MainAgent) </a:t>
+              <a:t>编排 </a:t>
+            </a:r>
+            <a:r>
+              <a:rPr lang="zh-CN" altLang="zh-CN" b="1" dirty="0">
+                <a:solidFill>
+                  <a:schemeClr val="accent2">
+                    <a:lumMod val="75000"/>
+                  </a:schemeClr>
+                </a:solidFill>
+              </a:rPr>
+              <a:t>Agent</a:t>
+            </a:r>
+            <a:r>
+              <a:rPr lang="zh-CN" altLang="zh-CN" b="1" dirty="0">
+                <a:solidFill>
+                  <a:srgbClr val="FF0000"/>
+                </a:solidFill>
+              </a:rPr>
+              <a:t> </a:t>
+            </a:r>
+            <a:r>
+              <a:rPr lang="zh-CN" altLang="zh-CN" b="1" dirty="0">
+                <a:solidFill>
+                  <a:schemeClr val="bg1"/>
+                </a:solidFill>
+              </a:rPr>
+              <a:t>(MainAgent) </a:t>
             </a:r>
             <a:endParaRPr lang="en-US" altLang="zh-CN" b="1" dirty="0">
               <a:solidFill>
@@ -6974,14 +7437,34 @@
               <a:t>5 个职能 Agent 协同工作 </a:t>
             </a:r>
             <a:r>
+              <a:rPr lang="en-US" altLang="zh-CN" sz="2000" dirty="0">
+                <a:solidFill>
+                  <a:schemeClr val="accent2">
+                    <a:lumMod val="60000"/>
+                    <a:lumOff val="40000"/>
+                  </a:schemeClr>
+                </a:solidFill>
+              </a:rPr>
+              <a:t>|</a:t>
+            </a:r>
+            <a:r>
               <a:rPr lang="zh-CN" altLang="zh-CN" sz="2000" dirty="0">
                 <a:solidFill>
-                  <a:schemeClr val="bg2">
-                    <a:lumMod val="25000"/>
-                  </a:schemeClr>
-                </a:solidFill>
-              </a:rPr>
-              <a:t>· </a:t>
+                  <a:schemeClr val="accent5"/>
+                </a:solidFill>
+              </a:rPr>
+              <a:t> ToolUseLoop 推理引擎驱动 </a:t>
+            </a:r>
+            <a:r>
+              <a:rPr lang="en-US" altLang="zh-CN" sz="2000" dirty="0">
+                <a:solidFill>
+                  <a:schemeClr val="accent2">
+                    <a:lumMod val="60000"/>
+                    <a:lumOff val="40000"/>
+                  </a:schemeClr>
+                </a:solidFill>
+              </a:rPr>
+              <a:t>|</a:t>
             </a:r>
             <a:r>
               <a:rPr lang="zh-CN" altLang="zh-CN" sz="2000" dirty="0">
@@ -6989,25 +7472,7 @@
                   <a:schemeClr val="accent5"/>
                 </a:solidFill>
               </a:rPr>
-              <a:t>ToolUseLoop 推理引擎驱动 </a:t>
-            </a:r>
-            <a:r>
-              <a:rPr lang="zh-CN" altLang="zh-CN" sz="2000" dirty="0">
-                <a:solidFill>
-                  <a:schemeClr val="bg2">
-                    <a:lumMod val="25000"/>
-                  </a:schemeClr>
-                </a:solidFill>
-              </a:rPr>
-              <a:t>· </a:t>
-            </a:r>
-            <a:r>
-              <a:rPr lang="zh-CN" altLang="zh-CN" sz="2000" dirty="0">
-                <a:solidFill>
-                  <a:schemeClr val="accent5"/>
-                </a:solidFill>
-              </a:rPr>
-              <a:t>端到端任务闭环</a:t>
+              <a:t> 端到端任务闭环</a:t>
             </a:r>
           </a:p>
         </p:txBody>
@@ -7074,7 +7539,25 @@
                   <a:schemeClr val="bg1"/>
                 </a:solidFill>
               </a:rPr>
-              <a:t> Agent </a:t>
+              <a:t> </a:t>
+            </a:r>
+            <a:r>
+              <a:rPr lang="zh-CN" altLang="zh-CN" b="1" dirty="0">
+                <a:solidFill>
+                  <a:schemeClr val="accent2">
+                    <a:lumMod val="75000"/>
+                  </a:schemeClr>
+                </a:solidFill>
+              </a:rPr>
+              <a:t>Agent</a:t>
+            </a:r>
+            <a:r>
+              <a:rPr lang="zh-CN" altLang="zh-CN" b="1" dirty="0">
+                <a:solidFill>
+                  <a:schemeClr val="bg1"/>
+                </a:solidFill>
+              </a:rPr>
+              <a:t> </a:t>
             </a:r>
             <a:endParaRPr lang="en-US" altLang="zh-CN" b="1" dirty="0">
               <a:solidFill>
@@ -7114,7 +7597,7 @@
         </p:nvSpPr>
         <p:spPr>
           <a:xfrm>
-            <a:off x="2387449" y="3294378"/>
+            <a:off x="2454956" y="3294378"/>
             <a:ext cx="1406121" cy="599672"/>
           </a:xfrm>
           <a:prstGeom prst="roundRect">
@@ -7162,7 +7645,25 @@
                   <a:schemeClr val="bg1"/>
                 </a:solidFill>
               </a:rPr>
-              <a:t> Agent </a:t>
+              <a:t> </a:t>
+            </a:r>
+            <a:r>
+              <a:rPr lang="zh-CN" altLang="zh-CN" b="1" dirty="0">
+                <a:solidFill>
+                  <a:schemeClr val="accent2">
+                    <a:lumMod val="75000"/>
+                  </a:schemeClr>
+                </a:solidFill>
+              </a:rPr>
+              <a:t>Agent</a:t>
+            </a:r>
+            <a:r>
+              <a:rPr lang="zh-CN" altLang="zh-CN" b="1" dirty="0">
+                <a:solidFill>
+                  <a:schemeClr val="bg1"/>
+                </a:solidFill>
+              </a:rPr>
+              <a:t> </a:t>
             </a:r>
             <a:endParaRPr lang="en-US" altLang="zh-CN" b="1" dirty="0">
               <a:solidFill>
@@ -7237,15 +7738,25 @@
                   <a:schemeClr val="bg1"/>
                 </a:solidFill>
               </a:rPr>
-              <a:t>反思</a:t>
+              <a:t>反思 </a:t>
             </a:r>
             <a:r>
               <a:rPr lang="zh-CN" altLang="zh-CN" b="1" dirty="0">
                 <a:solidFill>
+                  <a:schemeClr val="accent2">
+                    <a:lumMod val="75000"/>
+                  </a:schemeClr>
+                </a:solidFill>
+              </a:rPr>
+              <a:t>Agent</a:t>
+            </a:r>
+            <a:r>
+              <a:rPr lang="zh-CN" altLang="zh-CN" b="1" dirty="0">
+                <a:solidFill>
                   <a:schemeClr val="bg1"/>
                 </a:solidFill>
               </a:rPr>
-              <a:t>Agent </a:t>
+              <a:t> </a:t>
             </a:r>
             <a:endParaRPr lang="en-US" altLang="zh-CN" b="1" dirty="0">
               <a:solidFill>
@@ -7280,7 +7791,7 @@
         </p:nvSpPr>
         <p:spPr>
           <a:xfrm>
-            <a:off x="6041963" y="3294378"/>
+            <a:off x="5830067" y="3301020"/>
             <a:ext cx="4660175" cy="599672"/>
           </a:xfrm>
           <a:prstGeom prst="roundRect">
@@ -7328,7 +7839,17 @@
                   <a:schemeClr val="bg1"/>
                 </a:solidFill>
               </a:rPr>
-              <a:t> Agent</a:t>
+              <a:t> </a:t>
+            </a:r>
+            <a:r>
+              <a:rPr lang="zh-CN" altLang="zh-CN" b="1" dirty="0">
+                <a:solidFill>
+                  <a:schemeClr val="accent2">
+                    <a:lumMod val="75000"/>
+                  </a:schemeClr>
+                </a:solidFill>
+              </a:rPr>
+              <a:t>Agent</a:t>
             </a:r>
             <a:r>
               <a:rPr lang="zh-CN" altLang="en-US" b="1" dirty="0">
@@ -7395,7 +7916,7 @@
         </p:nvSpPr>
         <p:spPr>
           <a:xfrm>
-            <a:off x="6041963" y="4161349"/>
+            <a:off x="5833305" y="4069294"/>
             <a:ext cx="4655827" cy="599672"/>
           </a:xfrm>
           <a:prstGeom prst="roundRect">
@@ -7815,10 +8336,18 @@
             <a:r>
               <a:rPr lang="zh-CN" altLang="zh-CN" sz="1100" dirty="0">
                 <a:solidFill>
+                  <a:schemeClr val="accent5"/>
+                </a:solidFill>
+              </a:rPr>
+              <a:t>│</a:t>
+            </a:r>
+            <a:r>
+              <a:rPr lang="zh-CN" altLang="zh-CN" sz="1100" dirty="0">
+                <a:solidFill>
                   <a:schemeClr val="accent2"/>
                 </a:solidFill>
               </a:rPr>
-              <a:t>│ </a:t>
+              <a:t> </a:t>
             </a:r>
             <a:r>
               <a:rPr lang="zh-CN" altLang="zh-CN" sz="1100" dirty="0">
@@ -7854,13 +8383,13 @@
         </p:nvCxnSpPr>
         <p:spPr>
           <a:xfrm>
-            <a:off x="5759706" y="2261001"/>
-            <a:ext cx="6115" cy="199317"/>
+            <a:off x="5759706" y="2273951"/>
+            <a:ext cx="6115" cy="186367"/>
           </a:xfrm>
           <a:prstGeom prst="straightConnector1">
             <a:avLst/>
           </a:prstGeom>
-          <a:ln>
+          <a:ln w="38100">
             <a:tailEnd type="triangle"/>
           </a:ln>
         </p:spPr>
@@ -7903,18 +8432,18 @@
           <a:prstGeom prst="bentConnector3">
             <a:avLst/>
           </a:prstGeom>
-          <a:ln>
+          <a:ln w="38100">
             <a:tailEnd type="triangle"/>
           </a:ln>
         </p:spPr>
         <p:style>
-          <a:lnRef idx="1">
+          <a:lnRef idx="2">
             <a:schemeClr val="accent5"/>
           </a:lnRef>
           <a:fillRef idx="0">
             <a:schemeClr val="accent5"/>
           </a:fillRef>
-          <a:effectRef idx="0">
+          <a:effectRef idx="1">
             <a:schemeClr val="accent5"/>
           </a:effectRef>
           <a:fontRef idx="minor">
@@ -7940,24 +8469,24 @@
         </p:nvCxnSpPr>
         <p:spPr>
           <a:xfrm rot="16200000" flipH="1">
-            <a:off x="6894103" y="1816430"/>
-            <a:ext cx="349666" cy="2606230"/>
+            <a:off x="6784834" y="1925699"/>
+            <a:ext cx="356308" cy="2394334"/>
           </a:xfrm>
           <a:prstGeom prst="bentConnector3">
             <a:avLst/>
           </a:prstGeom>
-          <a:ln>
+          <a:ln w="38100">
             <a:tailEnd type="triangle"/>
           </a:ln>
         </p:spPr>
         <p:style>
-          <a:lnRef idx="1">
+          <a:lnRef idx="2">
             <a:schemeClr val="accent5"/>
           </a:lnRef>
           <a:fillRef idx="0">
             <a:schemeClr val="accent5"/>
           </a:fillRef>
-          <a:effectRef idx="0">
+          <a:effectRef idx="1">
             <a:schemeClr val="accent5"/>
           </a:effectRef>
           <a:fontRef idx="minor">
@@ -7983,24 +8512,24 @@
         </p:nvCxnSpPr>
         <p:spPr>
           <a:xfrm rot="5400000">
-            <a:off x="4253333" y="1781890"/>
-            <a:ext cx="349666" cy="2675311"/>
+            <a:off x="4287086" y="1815643"/>
+            <a:ext cx="349666" cy="2607804"/>
           </a:xfrm>
           <a:prstGeom prst="bentConnector3">
             <a:avLst/>
           </a:prstGeom>
-          <a:ln>
+          <a:ln w="38100">
             <a:tailEnd type="triangle"/>
           </a:ln>
         </p:spPr>
         <p:style>
-          <a:lnRef idx="1">
+          <a:lnRef idx="2">
             <a:schemeClr val="accent5"/>
           </a:lnRef>
           <a:fillRef idx="0">
             <a:schemeClr val="accent5"/>
           </a:fillRef>
-          <a:effectRef idx="0">
+          <a:effectRef idx="1">
             <a:schemeClr val="accent5"/>
           </a:effectRef>
           <a:fontRef idx="minor">
@@ -8032,18 +8561,18 @@
           <a:prstGeom prst="bentConnector3">
             <a:avLst/>
           </a:prstGeom>
-          <a:ln>
+          <a:ln w="38100">
             <a:tailEnd type="triangle"/>
           </a:ln>
         </p:spPr>
         <p:style>
-          <a:lnRef idx="1">
+          <a:lnRef idx="2">
             <a:schemeClr val="accent5"/>
           </a:lnRef>
           <a:fillRef idx="0">
             <a:schemeClr val="accent5"/>
           </a:fillRef>
-          <a:effectRef idx="0">
+          <a:effectRef idx="1">
             <a:schemeClr val="accent5"/>
           </a:effectRef>
           <a:fontRef idx="minor">
@@ -8068,25 +8597,25 @@
           <p:nvPr/>
         </p:nvCxnSpPr>
         <p:spPr>
-          <a:xfrm rot="5400000">
-            <a:off x="8237315" y="4026612"/>
-            <a:ext cx="267299" cy="2174"/>
+          <a:xfrm rot="16200000" flipH="1">
+            <a:off x="8076386" y="3984461"/>
+            <a:ext cx="168602" cy="1064"/>
           </a:xfrm>
           <a:prstGeom prst="bentConnector3">
             <a:avLst/>
           </a:prstGeom>
-          <a:ln>
+          <a:ln w="38100">
             <a:tailEnd type="triangle"/>
           </a:ln>
         </p:spPr>
         <p:style>
-          <a:lnRef idx="1">
+          <a:lnRef idx="2">
             <a:schemeClr val="accent5"/>
           </a:lnRef>
           <a:fillRef idx="0">
             <a:schemeClr val="accent5"/>
           </a:fillRef>
-          <a:effectRef idx="0">
+          <a:effectRef idx="1">
             <a:schemeClr val="accent5"/>
           </a:effectRef>
           <a:fontRef idx="minor">
@@ -8112,24 +8641,24 @@
         </p:nvCxnSpPr>
         <p:spPr>
           <a:xfrm rot="5400000">
-            <a:off x="6696924" y="3376010"/>
-            <a:ext cx="287942" cy="3057965"/>
+            <a:off x="6546568" y="3434311"/>
+            <a:ext cx="379997" cy="2849307"/>
           </a:xfrm>
           <a:prstGeom prst="bentConnector3">
             <a:avLst/>
           </a:prstGeom>
-          <a:ln>
+          <a:ln w="38100">
             <a:tailEnd type="triangle"/>
           </a:ln>
         </p:spPr>
         <p:style>
-          <a:lnRef idx="1">
+          <a:lnRef idx="2">
             <a:schemeClr val="accent5"/>
           </a:lnRef>
           <a:fillRef idx="0">
             <a:schemeClr val="accent5"/>
           </a:fillRef>
-          <a:effectRef idx="0">
+          <a:effectRef idx="1">
             <a:schemeClr val="accent5"/>
           </a:effectRef>
           <a:fontRef idx="minor">
@@ -8155,24 +8684,24 @@
         </p:nvCxnSpPr>
         <p:spPr>
           <a:xfrm rot="5400000">
-            <a:off x="7814324" y="4486802"/>
-            <a:ext cx="281334" cy="829773"/>
+            <a:off x="7663968" y="4545103"/>
+            <a:ext cx="373389" cy="621115"/>
           </a:xfrm>
           <a:prstGeom prst="bentConnector3">
             <a:avLst/>
           </a:prstGeom>
-          <a:ln>
+          <a:ln w="38100">
             <a:tailEnd type="triangle"/>
           </a:ln>
         </p:spPr>
         <p:style>
-          <a:lnRef idx="1">
+          <a:lnRef idx="2">
             <a:schemeClr val="accent5"/>
           </a:lnRef>
           <a:fillRef idx="0">
             <a:schemeClr val="accent5"/>
           </a:fillRef>
-          <a:effectRef idx="0">
+          <a:effectRef idx="1">
             <a:schemeClr val="accent5"/>
           </a:effectRef>
           <a:fontRef idx="minor">
@@ -8198,24 +8727,24 @@
         </p:nvCxnSpPr>
         <p:spPr>
           <a:xfrm rot="16200000" flipH="1">
-            <a:off x="8839135" y="4291762"/>
-            <a:ext cx="285524" cy="1224041"/>
+            <a:off x="8688779" y="4141405"/>
+            <a:ext cx="377579" cy="1432699"/>
           </a:xfrm>
           <a:prstGeom prst="bentConnector3">
             <a:avLst/>
           </a:prstGeom>
-          <a:ln>
+          <a:ln w="38100">
             <a:tailEnd type="triangle"/>
           </a:ln>
         </p:spPr>
         <p:style>
-          <a:lnRef idx="1">
+          <a:lnRef idx="2">
             <a:schemeClr val="accent5"/>
           </a:lnRef>
           <a:fillRef idx="0">
             <a:schemeClr val="accent5"/>
           </a:fillRef>
-          <a:effectRef idx="0">
+          <a:effectRef idx="1">
             <a:schemeClr val="accent5"/>
           </a:effectRef>
           <a:fontRef idx="minor">
@@ -8245,18 +8774,18 @@
           <a:prstGeom prst="straightConnector1">
             <a:avLst/>
           </a:prstGeom>
-          <a:ln>
+          <a:ln w="38100">
             <a:tailEnd type="triangle"/>
           </a:ln>
         </p:spPr>
         <p:style>
-          <a:lnRef idx="1">
+          <a:lnRef idx="2">
             <a:schemeClr val="accent5"/>
           </a:lnRef>
           <a:fillRef idx="0">
             <a:schemeClr val="accent5"/>
           </a:fillRef>
-          <a:effectRef idx="0">
+          <a:effectRef idx="1">
             <a:schemeClr val="accent5"/>
           </a:effectRef>
           <a:fontRef idx="minor">
@@ -8286,19 +8815,19 @@
           <a:prstGeom prst="straightConnector1">
             <a:avLst/>
           </a:prstGeom>
-          <a:ln>
+          <a:ln w="38100">
             <a:tailEnd type="triangle"/>
           </a:ln>
         </p:spPr>
         <p:style>
-          <a:lnRef idx="1">
-            <a:schemeClr val="accent4"/>
+          <a:lnRef idx="2">
+            <a:schemeClr val="accent5"/>
           </a:lnRef>
           <a:fillRef idx="0">
-            <a:schemeClr val="accent4"/>
+            <a:schemeClr val="accent5"/>
           </a:fillRef>
-          <a:effectRef idx="0">
-            <a:schemeClr val="accent4"/>
+          <a:effectRef idx="1">
+            <a:schemeClr val="accent5"/>
           </a:effectRef>
           <a:fontRef idx="minor">
             <a:schemeClr val="tx1"/>
@@ -8327,19 +8856,19 @@
           <a:prstGeom prst="straightConnector1">
             <a:avLst/>
           </a:prstGeom>
-          <a:ln>
+          <a:ln w="38100">
             <a:tailEnd type="triangle"/>
           </a:ln>
         </p:spPr>
         <p:style>
-          <a:lnRef idx="1">
-            <a:schemeClr val="accent4"/>
+          <a:lnRef idx="2">
+            <a:schemeClr val="accent5"/>
           </a:lnRef>
           <a:fillRef idx="0">
-            <a:schemeClr val="accent4"/>
+            <a:schemeClr val="accent5"/>
           </a:fillRef>
-          <a:effectRef idx="0">
-            <a:schemeClr val="accent4"/>
+          <a:effectRef idx="1">
+            <a:schemeClr val="accent5"/>
           </a:effectRef>
           <a:fontRef idx="minor">
             <a:schemeClr val="tx1"/>
@@ -9264,6 +9793,11 @@
             </a:pPr>
             <a:r>
               <a:rPr lang="zh-CN" altLang="zh-CN" sz="1275" b="1" i="0" dirty="0">
+                <a:solidFill>
+                  <a:schemeClr val="bg2">
+                    <a:lumMod val="50000"/>
+                  </a:schemeClr>
+                </a:solidFill>
                 <a:effectLst/>
                 <a:latin typeface="Lato" panose="020F0502020204030203" pitchFamily="34" charset="0"/>
               </a:rPr>
@@ -9271,6 +9805,11 @@
             </a:r>
             <a:r>
               <a:rPr lang="zh-CN" altLang="zh-CN" sz="1275" b="0" i="0" dirty="0">
+                <a:solidFill>
+                  <a:schemeClr val="bg2">
+                    <a:lumMod val="50000"/>
+                  </a:schemeClr>
+                </a:solidFill>
                 <a:effectLst/>
                 <a:latin typeface="Lato" panose="020F0502020204030203" pitchFamily="34" charset="0"/>
               </a:rPr>
@@ -9465,31 +10004,47 @@
           <a:lstStyle/>
           <a:p>
             <a:r>
-              <a:rPr lang="zh-CN" altLang="zh-CN" sz="2000" b="1" dirty="0"/>
+              <a:rPr lang="zh-CN" altLang="zh-CN" sz="2000" b="1" dirty="0">
+                <a:solidFill>
+                  <a:schemeClr val="bg2">
+                    <a:lumMod val="50000"/>
+                  </a:schemeClr>
+                </a:solidFill>
+              </a:rPr>
               <a:t>双路径并存，灰度切换</a:t>
             </a:r>
             <a:r>
-              <a:rPr lang="zh-CN" altLang="zh-CN" sz="2000" dirty="0"/>
+              <a:rPr lang="zh-CN" altLang="zh-CN" sz="2000" dirty="0">
+                <a:solidFill>
+                  <a:schemeClr val="bg2">
+                    <a:lumMod val="50000"/>
+                  </a:schemeClr>
+                </a:solidFill>
+              </a:rPr>
               <a:t>：</a:t>
             </a:r>
           </a:p>
           <a:p>
             <a:pPr lvl="1"/>
             <a:r>
+              <a:rPr lang="zh-CN" altLang="en-US" sz="1600" b="1" dirty="0">
+                <a:solidFill>
+                  <a:schemeClr val="accent2"/>
+                </a:solidFill>
+              </a:rPr>
+              <a:t>主</a:t>
+            </a:r>
+            <a:r>
               <a:rPr lang="zh-CN" altLang="zh-CN" sz="1600" b="1" dirty="0">
                 <a:solidFill>
-                  <a:schemeClr val="bg2">
-                    <a:lumMod val="50000"/>
-                  </a:schemeClr>
-                </a:solidFill>
-              </a:rPr>
-              <a:t>路径一：ToolUseLoop 推理引擎（主路径，默认开启）</a:t>
+                  <a:schemeClr val="accent2"/>
+                </a:solidFill>
+              </a:rPr>
+              <a:t>路径：ToolUseLoop 推理引擎</a:t>
             </a:r>
             <a:endParaRPr lang="zh-CN" altLang="zh-CN" sz="1600" dirty="0">
               <a:solidFill>
-                <a:schemeClr val="bg2">
-                  <a:lumMod val="50000"/>
-                </a:schemeClr>
+                <a:schemeClr val="accent2"/>
               </a:solidFill>
             </a:endParaRPr>
           </a:p>
@@ -9548,14 +10103,20 @@
           <a:p>
             <a:pPr lvl="1"/>
             <a:r>
+              <a:rPr lang="zh-CN" altLang="en-US" sz="1600" b="1" dirty="0">
+                <a:solidFill>
+                  <a:schemeClr val="accent2"/>
+                </a:solidFill>
+              </a:rPr>
+              <a:t>备用</a:t>
+            </a:r>
+            <a:r>
               <a:rPr lang="zh-CN" altLang="zh-CN" sz="1600" b="1" dirty="0">
                 <a:solidFill>
-                  <a:schemeClr val="bg2">
-                    <a:lumMod val="50000"/>
-                  </a:schemeClr>
-                </a:solidFill>
-              </a:rPr>
-              <a:t>路径二：规则路由（旧路径，保留兜底）</a:t>
+                  <a:schemeClr val="accent2"/>
+                </a:solidFill>
+              </a:rPr>
+              <a:t>路径：规则路由</a:t>
             </a:r>
           </a:p>
           <a:p>
@@ -9602,7 +10163,13 @@
           </a:p>
           <a:p>
             <a:r>
-              <a:rPr lang="zh-CN" altLang="zh-CN" sz="2000" b="1" dirty="0"/>
+              <a:rPr lang="zh-CN" altLang="zh-CN" sz="2000" b="1" dirty="0">
+                <a:solidFill>
+                  <a:schemeClr val="bg2">
+                    <a:lumMod val="50000"/>
+                  </a:schemeClr>
+                </a:solidFill>
+              </a:rPr>
               <a:t>上下文传递机制</a:t>
             </a:r>
           </a:p>
@@ -9766,16 +10333,28 @@
         <p:spPr/>
         <p:txBody>
           <a:bodyPr>
-            <a:normAutofit fontScale="47500" lnSpcReduction="20000"/>
+            <a:normAutofit fontScale="55000" lnSpcReduction="20000"/>
           </a:bodyPr>
           <a:lstStyle/>
           <a:p>
             <a:r>
-              <a:rPr lang="zh-CN" altLang="zh-CN" b="1" dirty="0"/>
+              <a:rPr lang="zh-CN" altLang="zh-CN" b="1" dirty="0">
+                <a:solidFill>
+                  <a:schemeClr val="bg2">
+                    <a:lumMod val="50000"/>
+                  </a:schemeClr>
+                </a:solidFill>
+              </a:rPr>
               <a:t>可插拔架构</a:t>
             </a:r>
             <a:r>
-              <a:rPr lang="zh-CN" altLang="zh-CN" dirty="0"/>
+              <a:rPr lang="zh-CN" altLang="zh-CN" dirty="0">
+                <a:solidFill>
+                  <a:schemeClr val="bg2">
+                    <a:lumMod val="50000"/>
+                  </a:schemeClr>
+                </a:solidFill>
+              </a:rPr>
               <a:t>：</a:t>
             </a:r>
           </a:p>
@@ -9809,268 +10388,420 @@
           </a:p>
           <a:p>
             <a:r>
-              <a:rPr lang="zh-CN" altLang="zh-CN" b="1" dirty="0"/>
-              <a:t>外部 Skill 三段式执行</a:t>
-            </a:r>
-            <a:r>
-              <a:rPr lang="zh-CN" altLang="zh-CN" dirty="0"/>
-              <a:t>（fallback 链）：</a:t>
+              <a:rPr lang="zh-CN" altLang="zh-CN" sz="2700" b="1" dirty="0">
+                <a:solidFill>
+                  <a:schemeClr val="bg2">
+                    <a:lumMod val="50000"/>
+                  </a:schemeClr>
+                </a:solidFill>
+              </a:rPr>
+              <a:t>外部 Skill 三段式执行（fallback 链）：</a:t>
             </a:r>
           </a:p>
           <a:p>
             <a:pPr lvl="1"/>
             <a:r>
-              <a:rPr lang="zh-CN" altLang="zh-CN" b="1" dirty="0"/>
+              <a:rPr lang="zh-CN" altLang="zh-CN" b="1" dirty="0">
+                <a:solidFill>
+                  <a:schemeClr val="bg2">
+                    <a:lumMod val="50000"/>
+                  </a:schemeClr>
+                </a:solidFill>
+              </a:rPr>
               <a:t>Python 脚本</a:t>
             </a:r>
             <a:r>
-              <a:rPr lang="zh-CN" altLang="zh-CN" dirty="0"/>
+              <a:rPr lang="zh-CN" altLang="zh-CN" dirty="0">
+                <a:solidFill>
+                  <a:schemeClr val="bg2">
+                    <a:lumMod val="50000"/>
+                  </a:schemeClr>
+                </a:solidFill>
+              </a:rPr>
               <a:t>：__main__.py，ProcessBuilder + stdin/stdout JSON，超时可配</a:t>
             </a:r>
           </a:p>
           <a:p>
             <a:pPr lvl="1"/>
             <a:r>
-              <a:rPr lang="zh-CN" altLang="zh-CN" b="1" dirty="0"/>
+              <a:rPr lang="zh-CN" altLang="zh-CN" b="1" dirty="0">
+                <a:solidFill>
+                  <a:schemeClr val="bg2">
+                    <a:lumMod val="50000"/>
+                  </a:schemeClr>
+                </a:solidFill>
+              </a:rPr>
               <a:t>CLI Command</a:t>
             </a:r>
             <a:r>
-              <a:rPr lang="zh-CN" altLang="zh-CN" dirty="0"/>
+              <a:rPr lang="zh-CN" altLang="zh-CN" dirty="0">
+                <a:solidFill>
+                  <a:schemeClr val="bg2">
+                    <a:lumMod val="50000"/>
+                  </a:schemeClr>
+                </a:solidFill>
+              </a:rPr>
               <a:t>：解析 </a:t>
             </a:r>
             <a:r>
               <a:rPr lang="zh-CN" altLang="zh-CN" u="sng" dirty="0">
-                <a:hlinkClick r:id="rId2"/>
+                <a:solidFill>
+                  <a:schemeClr val="bg2">
+                    <a:lumMod val="50000"/>
+                  </a:schemeClr>
+                </a:solidFill>
+                <a:hlinkClick r:id="rId2">
+                  <a:extLst>
+                    <a:ext uri="{A12FA001-AC4F-418D-AE19-62706E023703}">
+                      <ahyp:hlinkClr xmlns:ahyp="http://schemas.microsoft.com/office/drawing/2018/hyperlinkcolor" val="tx"/>
+                    </a:ext>
+                  </a:extLst>
+                </a:hlinkClick>
               </a:rPr>
               <a:t>skill.md</a:t>
             </a:r>
             <a:r>
-              <a:rPr lang="zh-CN" altLang="zh-CN" dirty="0"/>
+              <a:rPr lang="zh-CN" altLang="zh-CN" dirty="0">
+                <a:solidFill>
+                  <a:schemeClr val="bg2">
+                    <a:lumMod val="50000"/>
+                  </a:schemeClr>
+                </a:solidFill>
+              </a:rPr>
               <a:t> 的 ## CLI Command 块，占位符插值</a:t>
             </a:r>
           </a:p>
           <a:p>
             <a:pPr lvl="1"/>
             <a:r>
-              <a:rPr lang="zh-CN" altLang="zh-CN" b="1" dirty="0"/>
+              <a:rPr lang="zh-CN" altLang="zh-CN" b="1" dirty="0">
+                <a:solidFill>
+                  <a:schemeClr val="bg2">
+                    <a:lumMod val="50000"/>
+                  </a:schemeClr>
+                </a:solidFill>
+              </a:rPr>
               <a:t>LLM Guidance</a:t>
             </a:r>
             <a:r>
-              <a:rPr lang="zh-CN" altLang="zh-CN" dirty="0"/>
+              <a:rPr lang="zh-CN" altLang="zh-CN" dirty="0">
+                <a:solidFill>
+                  <a:schemeClr val="bg2">
+                    <a:lumMod val="50000"/>
+                  </a:schemeClr>
+                </a:solidFill>
+              </a:rPr>
               <a:t>：读 </a:t>
             </a:r>
             <a:r>
               <a:rPr lang="zh-CN" altLang="zh-CN" u="sng" dirty="0">
-                <a:hlinkClick r:id="rId3"/>
+                <a:solidFill>
+                  <a:schemeClr val="bg2">
+                    <a:lumMod val="50000"/>
+                  </a:schemeClr>
+                </a:solidFill>
+                <a:hlinkClick r:id="rId3">
+                  <a:extLst>
+                    <a:ext uri="{A12FA001-AC4F-418D-AE19-62706E023703}">
+                      <ahyp:hlinkClr xmlns:ahyp="http://schemas.microsoft.com/office/drawing/2018/hyperlinkcolor" val="tx"/>
+                    </a:ext>
+                  </a:extLst>
+                </a:hlinkClick>
               </a:rPr>
               <a:t>agent.md</a:t>
             </a:r>
             <a:r>
-              <a:rPr lang="zh-CN" altLang="zh-CN" dirty="0"/>
+              <a:rPr lang="zh-CN" altLang="zh-CN" dirty="0">
+                <a:solidFill>
+                  <a:schemeClr val="bg2">
+                    <a:lumMod val="50000"/>
+                  </a:schemeClr>
+                </a:solidFill>
+              </a:rPr>
               <a:t> + </a:t>
             </a:r>
             <a:r>
               <a:rPr lang="zh-CN" altLang="zh-CN" u="sng" dirty="0">
-                <a:hlinkClick r:id="rId2"/>
+                <a:solidFill>
+                  <a:schemeClr val="bg2">
+                    <a:lumMod val="50000"/>
+                  </a:schemeClr>
+                </a:solidFill>
+                <a:hlinkClick r:id="rId2">
+                  <a:extLst>
+                    <a:ext uri="{A12FA001-AC4F-418D-AE19-62706E023703}">
+                      <ahyp:hlinkClr xmlns:ahyp="http://schemas.microsoft.com/office/drawing/2018/hyperlinkcolor" val="tx"/>
+                    </a:ext>
+                  </a:extLst>
+                </a:hlinkClick>
               </a:rPr>
               <a:t>skill.md</a:t>
             </a:r>
             <a:r>
-              <a:rPr lang="zh-CN" altLang="zh-CN" dirty="0"/>
+              <a:rPr lang="zh-CN" altLang="zh-CN" dirty="0">
+                <a:solidFill>
+                  <a:schemeClr val="bg2">
+                    <a:lumMod val="50000"/>
+                  </a:schemeClr>
+                </a:solidFill>
+              </a:rPr>
               <a:t> 构造 system prompt 调 LLM</a:t>
             </a:r>
-            <a:endParaRPr lang="en-US" altLang="zh-CN" dirty="0"/>
-          </a:p>
-          <a:p>
-            <a:pPr lvl="1"/>
             <a:endParaRPr lang="zh-CN" altLang="zh-CN" dirty="0"/>
           </a:p>
           <a:p>
             <a:r>
-              <a:rPr lang="zh-CN" altLang="zh-CN" b="1" dirty="0"/>
+              <a:rPr lang="zh-CN" altLang="zh-CN" b="1" dirty="0">
+                <a:solidFill>
+                  <a:schemeClr val="bg2">
+                    <a:lumMod val="50000"/>
+                  </a:schemeClr>
+                </a:solidFill>
+              </a:rPr>
               <a:t>标准对齐</a:t>
             </a:r>
             <a:r>
-              <a:rPr lang="zh-CN" altLang="zh-CN" dirty="0"/>
+              <a:rPr lang="zh-CN" altLang="zh-CN" dirty="0">
+                <a:solidFill>
+                  <a:schemeClr val="bg2">
+                    <a:lumMod val="50000"/>
+                  </a:schemeClr>
+                </a:solidFill>
+              </a:rPr>
               <a:t>：</a:t>
             </a:r>
-            <a:endParaRPr lang="en-US" altLang="zh-CN" dirty="0"/>
-          </a:p>
-          <a:p>
-            <a:pPr lvl="1"/>
-            <a:r>
-              <a:rPr lang="zh-CN" altLang="zh-CN" u="sng" dirty="0">
-                <a:hlinkClick r:id="rId2"/>
-              </a:rPr>
-              <a:t>SKILL.md</a:t>
-            </a:r>
-            <a:r>
-              <a:rPr lang="zh-CN" altLang="zh-CN" dirty="0"/>
-              <a:t> / </a:t>
-            </a:r>
-            <a:r>
-              <a:rPr lang="zh-CN" altLang="zh-CN" u="sng" dirty="0">
-                <a:hlinkClick r:id="rId3"/>
-              </a:rPr>
-              <a:t>agent.md</a:t>
-            </a:r>
-            <a:r>
-              <a:rPr lang="zh-CN" altLang="zh-CN" dirty="0"/>
-              <a:t>（</a:t>
-            </a:r>
-            <a:r>
-              <a:rPr lang="zh-CN" altLang="zh-CN" u="sng" dirty="0">
-                <a:hlinkClick r:id="rId4"/>
-              </a:rPr>
-              <a:t>agentskills.io</a:t>
-            </a:r>
-            <a:r>
-              <a:rPr lang="zh-CN" altLang="zh-CN" dirty="0"/>
-              <a:t> 风格）双向解析与导出</a:t>
-            </a:r>
-            <a:endParaRPr lang="en-US" altLang="zh-CN" dirty="0"/>
-          </a:p>
-          <a:p>
-            <a:pPr lvl="1"/>
-            <a:endParaRPr lang="zh-CN" altLang="zh-CN" dirty="0"/>
-          </a:p>
-          <a:p>
-            <a:r>
-              <a:rPr lang="zh-CN" altLang="zh-CN" b="1" dirty="0"/>
-              <a:t>匹配与质量评估</a:t>
-            </a:r>
-            <a:r>
-              <a:rPr lang="zh-CN" altLang="zh-CN" dirty="0"/>
-              <a:t>：</a:t>
-            </a:r>
-          </a:p>
-          <a:p>
-            <a:pPr lvl="1"/>
-            <a:r>
-              <a:rPr lang="zh-CN" altLang="zh-CN" dirty="0"/>
-              <a:t>Trigger 打分：精确 1.0 </a:t>
-            </a:r>
-            <a:r>
-              <a:rPr lang="zh-CN" altLang="zh-CN" dirty="0">
-                <a:solidFill>
-                  <a:schemeClr val="accent6">
-                    <a:lumMod val="75000"/>
-                  </a:schemeClr>
-                </a:solidFill>
-              </a:rPr>
-              <a:t>→</a:t>
-            </a:r>
-            <a:r>
-              <a:rPr lang="zh-CN" altLang="zh-CN" dirty="0"/>
-              <a:t> startsWith 0.8 </a:t>
-            </a:r>
-            <a:r>
-              <a:rPr lang="zh-CN" altLang="zh-CN" dirty="0">
-                <a:solidFill>
-                  <a:schemeClr val="accent6">
-                    <a:lumMod val="75000"/>
-                  </a:schemeClr>
-                </a:solidFill>
-              </a:rPr>
-              <a:t>→</a:t>
-            </a:r>
-            <a:r>
-              <a:rPr lang="zh-CN" altLang="zh-CN" dirty="0"/>
-              <a:t> contains 0.6</a:t>
-            </a:r>
-          </a:p>
-          <a:p>
-            <a:pPr lvl="1"/>
-            <a:r>
-              <a:rPr lang="zh-CN" altLang="zh-CN" dirty="0"/>
-              <a:t>可见性控制：PUBLIC </a:t>
-            </a:r>
-            <a:r>
-              <a:rPr lang="zh-CN" altLang="zh-CN" dirty="0">
-                <a:solidFill>
-                  <a:schemeClr val="accent6">
-                    <a:lumMod val="75000"/>
-                  </a:schemeClr>
-                </a:solidFill>
-              </a:rPr>
-              <a:t>/</a:t>
-            </a:r>
-            <a:r>
-              <a:rPr lang="zh-CN" altLang="zh-CN" dirty="0"/>
-              <a:t> TENANT </a:t>
-            </a:r>
-            <a:r>
-              <a:rPr lang="zh-CN" altLang="zh-CN" dirty="0">
-                <a:solidFill>
-                  <a:schemeClr val="accent6">
-                    <a:lumMod val="75000"/>
-                  </a:schemeClr>
-                </a:solidFill>
-              </a:rPr>
-              <a:t>/</a:t>
-            </a:r>
-            <a:r>
-              <a:rPr lang="zh-CN" altLang="zh-CN" dirty="0"/>
-              <a:t> PRIVATE 三级</a:t>
-            </a:r>
-          </a:p>
-          <a:p>
-            <a:pPr lvl="1"/>
-            <a:r>
-              <a:rPr lang="zh-CN" altLang="zh-CN" dirty="0"/>
-              <a:t>版本管理：Skill 结晶自动生成版本号</a:t>
-            </a:r>
-          </a:p>
-          <a:p>
-            <a:pPr lvl="1"/>
-            <a:r>
-              <a:rPr lang="zh-CN" altLang="zh-CN" dirty="0"/>
-              <a:t>安全边界：toRealPath() + startsWith(skillsDir) 防路径穿越</a:t>
-            </a:r>
-            <a:endParaRPr lang="en-US" altLang="zh-CN" dirty="0"/>
-          </a:p>
-          <a:p>
-            <a:pPr lvl="1"/>
-            <a:endParaRPr lang="zh-CN" altLang="zh-CN" dirty="0"/>
-          </a:p>
-          <a:p>
-            <a:r>
-              <a:rPr lang="zh-CN" altLang="zh-CN" b="1" dirty="0"/>
-              <a:t>复用价值</a:t>
-            </a:r>
-            <a:endParaRPr lang="en-US" altLang="zh-CN" b="1" dirty="0"/>
-          </a:p>
-          <a:p>
-            <a:pPr lvl="1"/>
-            <a:r>
-              <a:rPr lang="zh-CN" altLang="zh-CN" dirty="0"/>
-              <a:t>第三方只需在 skills/&lt;id&gt;/ 目录放入 </a:t>
-            </a:r>
-            <a:r>
-              <a:rPr lang="zh-CN" altLang="zh-CN" u="sng" dirty="0">
-                <a:hlinkClick r:id="rId2"/>
-              </a:rPr>
-              <a:t>SKILL.md</a:t>
-            </a:r>
-            <a:r>
-              <a:rPr lang="zh-CN" altLang="zh-CN" dirty="0"/>
-              <a:t> + 执行脚本，即可零代码扩展 Agent 能力，无需修改 Java 源码。</a:t>
-            </a:r>
-          </a:p>
-          <a:p>
-            <a:pPr marL="0" indent="0">
-              <a:lnSpc>
-                <a:spcPct val="100000"/>
-              </a:lnSpc>
-              <a:buNone/>
-            </a:pPr>
-            <a:endParaRPr lang="zh-CN" altLang="zh-CN" sz="1400" dirty="0">
+            <a:endParaRPr lang="en-US" altLang="zh-CN" dirty="0">
               <a:solidFill>
                 <a:schemeClr val="bg2">
                   <a:lumMod val="50000"/>
                 </a:schemeClr>
               </a:solidFill>
             </a:endParaRPr>
+          </a:p>
+          <a:p>
+            <a:pPr lvl="1"/>
+            <a:r>
+              <a:rPr lang="zh-CN" altLang="zh-CN" u="sng" dirty="0">
+                <a:hlinkClick r:id="rId2"/>
+              </a:rPr>
+              <a:t>SKILL.md</a:t>
+            </a:r>
+            <a:r>
+              <a:rPr lang="zh-CN" altLang="zh-CN" dirty="0"/>
+              <a:t> / </a:t>
+            </a:r>
+            <a:r>
+              <a:rPr lang="zh-CN" altLang="zh-CN" u="sng" dirty="0">
+                <a:hlinkClick r:id="rId3"/>
+              </a:rPr>
+              <a:t>agent.md</a:t>
+            </a:r>
+            <a:r>
+              <a:rPr lang="zh-CN" altLang="zh-CN" dirty="0"/>
+              <a:t>（</a:t>
+            </a:r>
+            <a:r>
+              <a:rPr lang="zh-CN" altLang="zh-CN" u="sng" dirty="0">
+                <a:hlinkClick r:id="rId4"/>
+              </a:rPr>
+              <a:t>agentskills.io</a:t>
+            </a:r>
+            <a:r>
+              <a:rPr lang="zh-CN" altLang="zh-CN" dirty="0"/>
+              <a:t> </a:t>
+            </a:r>
+            <a:r>
+              <a:rPr lang="zh-CN" altLang="zh-CN" dirty="0">
+                <a:solidFill>
+                  <a:schemeClr val="bg2">
+                    <a:lumMod val="50000"/>
+                  </a:schemeClr>
+                </a:solidFill>
+              </a:rPr>
+              <a:t>风格）双向解析与导出</a:t>
+            </a:r>
+            <a:endParaRPr lang="zh-CN" altLang="zh-CN" dirty="0"/>
+          </a:p>
+          <a:p>
+            <a:r>
+              <a:rPr lang="zh-CN" altLang="zh-CN" b="1" dirty="0">
+                <a:solidFill>
+                  <a:schemeClr val="bg2">
+                    <a:lumMod val="50000"/>
+                  </a:schemeClr>
+                </a:solidFill>
+              </a:rPr>
+              <a:t>匹配与质量评估</a:t>
+            </a:r>
+            <a:r>
+              <a:rPr lang="zh-CN" altLang="zh-CN" dirty="0">
+                <a:solidFill>
+                  <a:schemeClr val="bg2">
+                    <a:lumMod val="50000"/>
+                  </a:schemeClr>
+                </a:solidFill>
+              </a:rPr>
+              <a:t>：</a:t>
+            </a:r>
+          </a:p>
+          <a:p>
+            <a:pPr lvl="1"/>
+            <a:r>
+              <a:rPr lang="zh-CN" altLang="zh-CN" b="1" dirty="0">
+                <a:solidFill>
+                  <a:schemeClr val="bg2">
+                    <a:lumMod val="50000"/>
+                  </a:schemeClr>
+                </a:solidFill>
+              </a:rPr>
+              <a:t>Trigger 打分</a:t>
+            </a:r>
+            <a:r>
+              <a:rPr lang="zh-CN" altLang="zh-CN" dirty="0">
+                <a:solidFill>
+                  <a:schemeClr val="bg2">
+                    <a:lumMod val="50000"/>
+                  </a:schemeClr>
+                </a:solidFill>
+              </a:rPr>
+              <a:t>：精确 1.0 → startsWith 0.8 → contains 0.6</a:t>
+            </a:r>
+          </a:p>
+          <a:p>
+            <a:pPr lvl="1"/>
+            <a:r>
+              <a:rPr lang="zh-CN" altLang="zh-CN" b="1" dirty="0">
+                <a:solidFill>
+                  <a:schemeClr val="bg2">
+                    <a:lumMod val="50000"/>
+                  </a:schemeClr>
+                </a:solidFill>
+              </a:rPr>
+              <a:t>可见性控制</a:t>
+            </a:r>
+            <a:r>
+              <a:rPr lang="zh-CN" altLang="zh-CN" dirty="0">
+                <a:solidFill>
+                  <a:schemeClr val="bg2">
+                    <a:lumMod val="50000"/>
+                  </a:schemeClr>
+                </a:solidFill>
+              </a:rPr>
+              <a:t>：PUBLIC / TENANT / PRIVATE 三级</a:t>
+            </a:r>
+          </a:p>
+          <a:p>
+            <a:pPr lvl="1"/>
+            <a:r>
+              <a:rPr lang="zh-CN" altLang="zh-CN" b="1" dirty="0">
+                <a:solidFill>
+                  <a:schemeClr val="bg2">
+                    <a:lumMod val="50000"/>
+                  </a:schemeClr>
+                </a:solidFill>
+              </a:rPr>
+              <a:t>版本管理</a:t>
+            </a:r>
+            <a:r>
+              <a:rPr lang="zh-CN" altLang="zh-CN" dirty="0">
+                <a:solidFill>
+                  <a:schemeClr val="bg2">
+                    <a:lumMod val="50000"/>
+                  </a:schemeClr>
+                </a:solidFill>
+              </a:rPr>
+              <a:t>：Skill 结晶自动生成版本号</a:t>
+            </a:r>
+          </a:p>
+          <a:p>
+            <a:pPr lvl="1"/>
+            <a:r>
+              <a:rPr lang="zh-CN" altLang="zh-CN" b="1" dirty="0">
+                <a:solidFill>
+                  <a:schemeClr val="bg2">
+                    <a:lumMod val="50000"/>
+                  </a:schemeClr>
+                </a:solidFill>
+              </a:rPr>
+              <a:t>安全边界</a:t>
+            </a:r>
+            <a:r>
+              <a:rPr lang="zh-CN" altLang="zh-CN" dirty="0">
+                <a:solidFill>
+                  <a:schemeClr val="bg2">
+                    <a:lumMod val="50000"/>
+                  </a:schemeClr>
+                </a:solidFill>
+              </a:rPr>
+              <a:t>：toRealPath() + startsWith(skillsDir) 防路径穿越</a:t>
+            </a:r>
+            <a:endParaRPr lang="en-US" altLang="zh-CN" dirty="0">
+              <a:solidFill>
+                <a:schemeClr val="bg2">
+                  <a:lumMod val="50000"/>
+                </a:schemeClr>
+              </a:solidFill>
+            </a:endParaRPr>
+          </a:p>
+          <a:p>
+            <a:pPr lvl="1"/>
+            <a:endParaRPr lang="zh-CN" altLang="zh-CN" dirty="0"/>
+          </a:p>
+          <a:p>
+            <a:r>
+              <a:rPr lang="zh-CN" altLang="zh-CN" b="1" dirty="0">
+                <a:solidFill>
+                  <a:schemeClr val="bg2">
+                    <a:lumMod val="50000"/>
+                  </a:schemeClr>
+                </a:solidFill>
+              </a:rPr>
+              <a:t>复用价值</a:t>
+            </a:r>
+            <a:r>
+              <a:rPr lang="zh-CN" altLang="en-US" dirty="0">
+                <a:solidFill>
+                  <a:schemeClr val="bg2">
+                    <a:lumMod val="50000"/>
+                  </a:schemeClr>
+                </a:solidFill>
+              </a:rPr>
+              <a:t>：</a:t>
+            </a:r>
+            <a:r>
+              <a:rPr lang="zh-CN" altLang="zh-CN" dirty="0">
+                <a:solidFill>
+                  <a:schemeClr val="bg2">
+                    <a:lumMod val="50000"/>
+                  </a:schemeClr>
+                </a:solidFill>
+              </a:rPr>
+              <a:t>第三方只需在 skills/&lt;id&gt;/ 目录放入</a:t>
+            </a:r>
+            <a:r>
+              <a:rPr lang="zh-CN" altLang="zh-CN" dirty="0"/>
+              <a:t> </a:t>
+            </a:r>
+            <a:r>
+              <a:rPr lang="zh-CN" altLang="zh-CN" u="sng" dirty="0">
+                <a:hlinkClick r:id="rId2"/>
+              </a:rPr>
+              <a:t>SKILL.md</a:t>
+            </a:r>
+            <a:r>
+              <a:rPr lang="zh-CN" altLang="zh-CN" dirty="0"/>
+              <a:t> </a:t>
+            </a:r>
+            <a:r>
+              <a:rPr lang="zh-CN" altLang="zh-CN" dirty="0">
+                <a:solidFill>
+                  <a:schemeClr val="bg2">
+                    <a:lumMod val="50000"/>
+                  </a:schemeClr>
+                </a:solidFill>
+              </a:rPr>
+              <a:t>+ 执行脚本，即可零代码扩展 Agent 能力，无需修改 Java 源码。</a:t>
+            </a:r>
           </a:p>
         </p:txBody>
       </p:sp>
@@ -10175,14 +10906,22 @@
           <a:lstStyle/>
           <a:p>
             <a:r>
-              <a:rPr lang="zh-CN" altLang="zh-CN" b="1" dirty="0"/>
-              <a:t>25 个企业级工具</a:t>
-            </a:r>
-            <a:r>
-              <a:rPr lang="zh-CN" altLang="zh-CN" dirty="0"/>
-              <a:t>（JSON Schema 定义，LLM 可见）：</a:t>
-            </a:r>
-            <a:endParaRPr lang="en-US" altLang="zh-CN" dirty="0"/>
+              <a:rPr lang="zh-CN" altLang="zh-CN" b="1" dirty="0">
+                <a:solidFill>
+                  <a:schemeClr val="bg2">
+                    <a:lumMod val="50000"/>
+                  </a:schemeClr>
+                </a:solidFill>
+              </a:rPr>
+              <a:t>25 个企业级工具（JSON Schema 定义，LLM 可见）：</a:t>
+            </a:r>
+            <a:endParaRPr lang="en-US" altLang="zh-CN" b="1" dirty="0">
+              <a:solidFill>
+                <a:schemeClr val="bg2">
+                  <a:lumMod val="50000"/>
+                </a:schemeClr>
+              </a:solidFill>
+            </a:endParaRPr>
           </a:p>
           <a:p>
             <a:endParaRPr lang="en-US" altLang="zh-CN" dirty="0"/>
@@ -10207,49 +10946,87 @@
           </a:p>
           <a:p>
             <a:r>
-              <a:rPr lang="zh-CN" altLang="zh-CN" b="1" dirty="0"/>
-              <a:t>工具接入协议</a:t>
-            </a:r>
-            <a:r>
-              <a:rPr lang="zh-CN" altLang="zh-CN" dirty="0"/>
-              <a:t>（等价 MCP 集成契约）：</a:t>
+              <a:rPr lang="zh-CN" altLang="zh-CN" b="1" dirty="0">
+                <a:solidFill>
+                  <a:schemeClr val="bg2">
+                    <a:lumMod val="50000"/>
+                  </a:schemeClr>
+                </a:solidFill>
+              </a:rPr>
+              <a:t>工具接入协议（等价 MCP 集成契约）：</a:t>
             </a:r>
           </a:p>
           <a:p>
             <a:pPr lvl="1"/>
             <a:r>
-              <a:rPr lang="zh-CN" altLang="zh-CN" dirty="0"/>
+              <a:rPr lang="zh-CN" altLang="zh-CN" dirty="0">
+                <a:solidFill>
+                  <a:schemeClr val="bg2">
+                    <a:lumMod val="50000"/>
+                  </a:schemeClr>
+                </a:solidFill>
+              </a:rPr>
               <a:t>每个工具 = ToolDefinition（name / description / parameters JSON Schema / executor / isWrite / needsConfirm）</a:t>
             </a:r>
           </a:p>
           <a:p>
             <a:pPr lvl="1"/>
             <a:r>
-              <a:rPr lang="zh-CN" altLang="zh-CN" dirty="0"/>
+              <a:rPr lang="zh-CN" altLang="zh-CN" dirty="0">
+                <a:solidFill>
+                  <a:schemeClr val="bg2">
+                    <a:lumMod val="50000"/>
+                  </a:schemeClr>
+                </a:solidFill>
+              </a:rPr>
               <a:t>DocSysClient 用 OkHttp 稳定封装 MxsDoc 后端 40+ 个 .do 接口</a:t>
             </a:r>
           </a:p>
           <a:p>
             <a:pPr lvl="1"/>
             <a:r>
-              <a:rPr lang="zh-CN" altLang="zh-CN" dirty="0"/>
+              <a:rPr lang="zh-CN" altLang="zh-CN" dirty="0">
+                <a:solidFill>
+                  <a:schemeClr val="bg2">
+                    <a:lumMod val="50000"/>
+                  </a:schemeClr>
+                </a:solidFill>
+              </a:rPr>
               <a:t>写工具统一 needsConfirm=true，走 SSE 审批门（WriteConfirmGate）</a:t>
             </a:r>
           </a:p>
           <a:p>
             <a:pPr lvl="1"/>
             <a:r>
-              <a:rPr lang="zh-CN" altLang="zh-CN" dirty="0"/>
+              <a:rPr lang="zh-CN" altLang="zh-CN" dirty="0">
+                <a:solidFill>
+                  <a:schemeClr val="bg2">
+                    <a:lumMod val="50000"/>
+                  </a:schemeClr>
+                </a:solidFill>
+              </a:rPr>
               <a:t>工具执行结果自动截断（4000 字符），防上下文溢出</a:t>
             </a:r>
           </a:p>
           <a:p>
             <a:pPr lvl="1"/>
             <a:r>
-              <a:rPr lang="zh-CN" altLang="zh-CN" dirty="0"/>
+              <a:rPr lang="zh-CN" altLang="zh-CN" dirty="0">
+                <a:solidFill>
+                  <a:schemeClr val="bg2">
+                    <a:lumMod val="50000"/>
+                  </a:schemeClr>
+                </a:solidFill>
+              </a:rPr>
               <a:t>工具调用全程 Step 审计（[ToolUseLoop][STEP] 结构化日志）</a:t>
             </a:r>
-            <a:endParaRPr lang="en-US" altLang="zh-CN" dirty="0"/>
+            <a:endParaRPr lang="en-US" altLang="zh-CN" dirty="0">
+              <a:solidFill>
+                <a:schemeClr val="bg2">
+                  <a:lumMod val="50000"/>
+                </a:schemeClr>
+              </a:solidFill>
+            </a:endParaRPr>
           </a:p>
           <a:p>
             <a:pPr lvl="1"/>
@@ -10257,71 +11034,105 @@
           </a:p>
           <a:p>
             <a:r>
-              <a:rPr lang="zh-CN" altLang="zh-CN" b="1" dirty="0"/>
-              <a:t>RAG 能力落地</a:t>
-            </a:r>
-            <a:r>
-              <a:rPr lang="zh-CN" altLang="zh-CN" dirty="0"/>
-              <a:t>（4 项中 ≥2 项）：</a:t>
+              <a:rPr lang="zh-CN" altLang="zh-CN" b="1" dirty="0">
+                <a:solidFill>
+                  <a:schemeClr val="bg2">
+                    <a:lumMod val="50000"/>
+                  </a:schemeClr>
+                </a:solidFill>
+              </a:rPr>
+              <a:t>RAG 能力落地：</a:t>
             </a:r>
           </a:p>
           <a:p>
             <a:pPr lvl="1"/>
             <a:r>
-              <a:rPr lang="zh-CN" altLang="zh-CN" dirty="0"/>
-              <a:t>✅ </a:t>
-            </a:r>
-            <a:r>
-              <a:rPr lang="zh-CN" altLang="zh-CN" b="1" dirty="0"/>
+              <a:rPr lang="zh-CN" altLang="zh-CN" b="1" dirty="0">
+                <a:solidFill>
+                  <a:schemeClr val="bg2">
+                    <a:lumMod val="50000"/>
+                  </a:schemeClr>
+                </a:solidFill>
+              </a:rPr>
               <a:t>检索增强生成</a:t>
             </a:r>
             <a:r>
-              <a:rPr lang="zh-CN" altLang="zh-CN" dirty="0"/>
+              <a:rPr lang="zh-CN" altLang="zh-CN" dirty="0">
+                <a:solidFill>
+                  <a:schemeClr val="bg2">
+                    <a:lumMod val="50000"/>
+                  </a:schemeClr>
+                </a:solidFill>
+              </a:rPr>
               <a:t>：rag_chat 工具，走 DocSys RAG 管线（文档向量化 + 语义检索）</a:t>
             </a:r>
           </a:p>
           <a:p>
             <a:pPr lvl="1"/>
             <a:r>
-              <a:rPr lang="zh-CN" altLang="zh-CN" dirty="0"/>
-              <a:t>✅ </a:t>
-            </a:r>
-            <a:r>
-              <a:rPr lang="zh-CN" altLang="zh-CN" b="1" dirty="0"/>
+              <a:rPr lang="zh-CN" altLang="zh-CN" b="1" dirty="0">
+                <a:solidFill>
+                  <a:schemeClr val="bg2">
+                    <a:lumMod val="50000"/>
+                  </a:schemeClr>
+                </a:solidFill>
+              </a:rPr>
               <a:t>全文搜索</a:t>
             </a:r>
             <a:r>
-              <a:rPr lang="zh-CN" altLang="zh-CN" dirty="0"/>
+              <a:rPr lang="zh-CN" altLang="zh-CN" dirty="0">
+                <a:solidFill>
+                  <a:schemeClr val="bg2">
+                    <a:lumMod val="50000"/>
+                  </a:schemeClr>
+                </a:solidFill>
+              </a:rPr>
               <a:t>：search_docs 工具，走 DocSys 全文检索引擎</a:t>
             </a:r>
           </a:p>
           <a:p>
             <a:pPr lvl="1"/>
             <a:r>
-              <a:rPr lang="zh-CN" altLang="zh-CN" dirty="0"/>
-              <a:t>✅ </a:t>
-            </a:r>
-            <a:r>
-              <a:rPr lang="zh-CN" altLang="zh-CN" b="1" dirty="0"/>
+              <a:rPr lang="zh-CN" altLang="zh-CN" b="1" dirty="0">
+                <a:solidFill>
+                  <a:schemeClr val="bg2">
+                    <a:lumMod val="50000"/>
+                  </a:schemeClr>
+                </a:solidFill>
+              </a:rPr>
               <a:t>会话历史注入</a:t>
             </a:r>
             <a:r>
-              <a:rPr lang="zh-CN" altLang="zh-CN" dirty="0"/>
+              <a:rPr lang="zh-CN" altLang="zh-CN" dirty="0">
+                <a:solidFill>
+                  <a:schemeClr val="bg2">
+                    <a:lumMod val="50000"/>
+                  </a:schemeClr>
+                </a:solidFill>
+              </a:rPr>
               <a:t>：最近 20 条对话作为上下文增强</a:t>
             </a:r>
           </a:p>
           <a:p>
             <a:pPr lvl="1"/>
             <a:r>
-              <a:rPr lang="zh-CN" altLang="zh-CN" dirty="0"/>
-              <a:t>✅ </a:t>
-            </a:r>
-            <a:r>
-              <a:rPr lang="zh-CN" altLang="zh-CN" b="1" dirty="0"/>
+              <a:rPr lang="zh-CN" altLang="zh-CN" b="1" dirty="0">
+                <a:solidFill>
+                  <a:schemeClr val="bg2">
+                    <a:lumMod val="50000"/>
+                  </a:schemeClr>
+                </a:solidFill>
+              </a:rPr>
               <a:t>用户记忆持久化</a:t>
             </a:r>
             <a:r>
-              <a:rPr lang="zh-CN" altLang="zh-CN" dirty="0"/>
+              <a:rPr lang="zh-CN" altLang="zh-CN" dirty="0">
+                <a:solidFill>
+                  <a:schemeClr val="bg2">
+                    <a:lumMod val="50000"/>
+                  </a:schemeClr>
+                </a:solidFill>
+              </a:rPr>
               <a:t>：memory_set/get/list 工具，跨会话记忆复用</a:t>
             </a:r>
           </a:p>
@@ -10639,91 +11450,213 @@
         <p:spPr/>
         <p:txBody>
           <a:bodyPr>
-            <a:normAutofit fontScale="77500" lnSpcReduction="20000"/>
+            <a:normAutofit fontScale="92500" lnSpcReduction="10000"/>
           </a:bodyPr>
           <a:lstStyle/>
           <a:p>
             <a:r>
-              <a:rPr lang="zh-CN" altLang="zh-CN" sz="2600" b="1" dirty="0"/>
+              <a:rPr lang="zh-CN" altLang="zh-CN" sz="2600" b="1" dirty="0">
+                <a:solidFill>
+                  <a:schemeClr val="bg2">
+                    <a:lumMod val="50000"/>
+                  </a:schemeClr>
+                </a:solidFill>
+              </a:rPr>
               <a:t>结果验证机制</a:t>
             </a:r>
             <a:r>
-              <a:rPr lang="zh-CN" altLang="zh-CN" sz="2600" dirty="0"/>
+              <a:rPr lang="zh-CN" altLang="zh-CN" sz="2600" dirty="0">
+                <a:solidFill>
+                  <a:schemeClr val="bg2">
+                    <a:lumMod val="50000"/>
+                  </a:schemeClr>
+                </a:solidFill>
+              </a:rPr>
               <a:t>：</a:t>
             </a:r>
           </a:p>
           <a:p>
             <a:pPr lvl="1"/>
             <a:r>
-              <a:rPr lang="zh-CN" altLang="zh-CN" sz="1300" dirty="0"/>
-              <a:t>编排层校验：成功子任务数 ≥ 期望数 → 标记 COMPLETED</a:t>
+              <a:rPr lang="zh-CN" altLang="zh-CN" sz="1300" b="1" dirty="0">
+                <a:solidFill>
+                  <a:schemeClr val="bg2">
+                    <a:lumMod val="50000"/>
+                  </a:schemeClr>
+                </a:solidFill>
+              </a:rPr>
+              <a:t>编排层校验</a:t>
+            </a:r>
+            <a:r>
+              <a:rPr lang="zh-CN" altLang="zh-CN" sz="1300" dirty="0">
+                <a:solidFill>
+                  <a:schemeClr val="bg2">
+                    <a:lumMod val="50000"/>
+                  </a:schemeClr>
+                </a:solidFill>
+              </a:rPr>
+              <a:t>：成功子任务数 ≥ 期望数 → 标记 COMPLETED</a:t>
             </a:r>
           </a:p>
           <a:p>
             <a:pPr lvl="1"/>
             <a:r>
-              <a:rPr lang="zh-CN" altLang="zh-CN" sz="1300" dirty="0"/>
-              <a:t>SelfDiagnostics：滑动窗口（200 条）计算成功率 + P50/P95/P99 延迟</a:t>
+              <a:rPr lang="zh-CN" altLang="zh-CN" sz="1300" b="1" dirty="0">
+                <a:solidFill>
+                  <a:schemeClr val="bg2">
+                    <a:lumMod val="50000"/>
+                  </a:schemeClr>
+                </a:solidFill>
+              </a:rPr>
+              <a:t>SelfDiagnostics</a:t>
+            </a:r>
+            <a:r>
+              <a:rPr lang="zh-CN" altLang="zh-CN" sz="1300" dirty="0">
+                <a:solidFill>
+                  <a:schemeClr val="bg2">
+                    <a:lumMod val="50000"/>
+                  </a:schemeClr>
+                </a:solidFill>
+              </a:rPr>
+              <a:t>：滑动窗口（200 条）计算成功率 + P50/P95/P99 延迟</a:t>
+            </a:r>
+            <a:r>
+              <a:rPr lang="zh-CN" altLang="en-US" sz="1300" dirty="0">
+                <a:solidFill>
+                  <a:schemeClr val="bg2">
+                    <a:lumMod val="50000"/>
+                  </a:schemeClr>
+                </a:solidFill>
+              </a:rPr>
+              <a:t>，</a:t>
+            </a:r>
+            <a:r>
+              <a:rPr lang="zh-CN" altLang="zh-CN" sz="1300" dirty="0">
+                <a:solidFill>
+                  <a:schemeClr val="bg2">
+                    <a:lumMod val="50000"/>
+                  </a:schemeClr>
+                </a:solidFill>
+              </a:rPr>
+              <a:t>错误率 &gt; 30% 或 P95 &gt; 5s → 告警（30 分钟去重）</a:t>
             </a:r>
           </a:p>
           <a:p>
             <a:pPr lvl="1"/>
             <a:r>
-              <a:rPr lang="zh-CN" altLang="zh-CN" sz="1300" dirty="0"/>
-              <a:t>错误率 &gt; 30% 或 P95 &gt; 5s → 告警（30 分钟去重）</a:t>
+              <a:rPr lang="zh-CN" altLang="zh-CN" sz="1300" b="1" dirty="0">
+                <a:solidFill>
+                  <a:schemeClr val="bg2">
+                    <a:lumMod val="50000"/>
+                  </a:schemeClr>
+                </a:solidFill>
+              </a:rPr>
+              <a:t>ToolUseLoop</a:t>
+            </a:r>
+            <a:r>
+              <a:rPr lang="zh-CN" altLang="zh-CN" sz="1300" dirty="0">
+                <a:solidFill>
+                  <a:schemeClr val="bg2">
+                    <a:lumMod val="50000"/>
+                  </a:schemeClr>
+                </a:solidFill>
+              </a:rPr>
+              <a:t>：LLM 自主验证工具返回结果，结果不符合预期 → 换策略重试</a:t>
             </a:r>
           </a:p>
           <a:p>
             <a:pPr lvl="1"/>
             <a:r>
-              <a:rPr lang="zh-CN" altLang="zh-CN" sz="1300" dirty="0"/>
-              <a:t>ToolUseLoop：LLM 自主验证工具返回结果，结果不符合预期 → 换策略重试</a:t>
-            </a:r>
+              <a:rPr lang="zh-CN" altLang="zh-CN" sz="1300" b="1" dirty="0">
+                <a:solidFill>
+                  <a:schemeClr val="bg2">
+                    <a:lumMod val="50000"/>
+                  </a:schemeClr>
+                </a:solidFill>
+              </a:rPr>
+              <a:t>防死循环</a:t>
+            </a:r>
+            <a:r>
+              <a:rPr lang="zh-CN" altLang="zh-CN" sz="1300" dirty="0">
+                <a:solidFill>
+                  <a:schemeClr val="bg2">
+                    <a:lumMod val="50000"/>
+                  </a:schemeClr>
+                </a:solidFill>
+              </a:rPr>
+              <a:t>：MAX_TURNS=10 + MAX_IDENTICAL_CALLS=3 + MAX_MALFORMED=3</a:t>
+            </a:r>
+            <a:endParaRPr lang="en-US" altLang="zh-CN" sz="1300" dirty="0">
+              <a:solidFill>
+                <a:schemeClr val="bg2">
+                  <a:lumMod val="50000"/>
+                </a:schemeClr>
+              </a:solidFill>
+            </a:endParaRPr>
+          </a:p>
+          <a:p>
+            <a:r>
+              <a:rPr lang="zh-CN" altLang="zh-CN" sz="2600" b="1" dirty="0">
+                <a:solidFill>
+                  <a:schemeClr val="bg2">
+                    <a:lumMod val="50000"/>
+                  </a:schemeClr>
+                </a:solidFill>
+              </a:rPr>
+              <a:t>异常分支全覆盖 </a:t>
+            </a:r>
+            <a:endParaRPr lang="en-US" altLang="zh-CN" b="1" dirty="0">
+              <a:solidFill>
+                <a:schemeClr val="bg2">
+                  <a:lumMod val="50000"/>
+                </a:schemeClr>
+              </a:solidFill>
+            </a:endParaRPr>
+          </a:p>
+          <a:p>
+            <a:endParaRPr lang="en-US" altLang="zh-CN" b="1" dirty="0"/>
+          </a:p>
+          <a:p>
+            <a:endParaRPr lang="en-US" altLang="zh-CN" b="1" dirty="0"/>
+          </a:p>
+          <a:p>
+            <a:endParaRPr lang="en-US" altLang="zh-CN" b="1" dirty="0"/>
+          </a:p>
+          <a:p>
+            <a:pPr marL="0" indent="0">
+              <a:buNone/>
+            </a:pPr>
+            <a:endParaRPr lang="en-US" altLang="zh-CN" b="1" dirty="0"/>
+          </a:p>
+          <a:p>
+            <a:r>
+              <a:rPr lang="zh-CN" altLang="zh-CN" sz="2600" b="1" dirty="0">
+                <a:solidFill>
+                  <a:schemeClr val="bg2">
+                    <a:lumMod val="50000"/>
+                  </a:schemeClr>
+                </a:solidFill>
+              </a:rPr>
+              <a:t>可靠性保障</a:t>
+            </a:r>
+            <a:endParaRPr lang="en-US" altLang="zh-CN" sz="2600" b="1" dirty="0">
+              <a:solidFill>
+                <a:schemeClr val="bg2">
+                  <a:lumMod val="50000"/>
+                </a:schemeClr>
+              </a:solidFill>
+            </a:endParaRPr>
           </a:p>
           <a:p>
             <a:pPr lvl="1"/>
             <a:r>
-              <a:rPr lang="zh-CN" altLang="zh-CN" sz="1300" dirty="0"/>
-              <a:t>防死循环：MAX_TURNS=10 + MAX_IDENTICAL_CALLS=3 + MAX_MALFORMED=3</a:t>
-            </a:r>
-            <a:endParaRPr lang="en-US" altLang="zh-CN" sz="1300" b="1" dirty="0"/>
-          </a:p>
-          <a:p>
-            <a:endParaRPr lang="en-US" altLang="zh-CN" sz="2600" b="1" dirty="0"/>
-          </a:p>
-          <a:p>
-            <a:r>
-              <a:rPr lang="zh-CN" altLang="zh-CN" sz="2600" b="1" dirty="0"/>
-              <a:t>异常分支全覆盖 </a:t>
-            </a:r>
-            <a:endParaRPr lang="en-US" altLang="zh-CN" b="1" dirty="0"/>
-          </a:p>
-          <a:p>
-            <a:endParaRPr lang="en-US" altLang="zh-CN" b="1" dirty="0"/>
-          </a:p>
-          <a:p>
-            <a:endParaRPr lang="en-US" altLang="zh-CN" b="1" dirty="0"/>
-          </a:p>
-          <a:p>
-            <a:endParaRPr lang="en-US" altLang="zh-CN" b="1" dirty="0"/>
-          </a:p>
-          <a:p>
-            <a:endParaRPr lang="en-US" altLang="zh-CN" b="1" dirty="0"/>
-          </a:p>
-          <a:p>
-            <a:endParaRPr lang="en-US" altLang="zh-CN" b="1" dirty="0"/>
-          </a:p>
-          <a:p>
-            <a:r>
-              <a:rPr lang="zh-CN" altLang="zh-CN" sz="2600" b="1" dirty="0"/>
-              <a:t>可靠性保障</a:t>
-            </a:r>
-            <a:endParaRPr lang="en-US" altLang="zh-CN" sz="2600" b="1" dirty="0"/>
-          </a:p>
-          <a:p>
-            <a:pPr lvl="1"/>
-            <a:r>
-              <a:rPr lang="zh-CN" altLang="zh-CN" sz="1300" dirty="0"/>
+              <a:rPr lang="zh-CN" altLang="zh-CN" sz="1300" dirty="0">
+                <a:solidFill>
+                  <a:schemeClr val="bg2">
+                    <a:lumMod val="50000"/>
+                  </a:schemeClr>
+                </a:solidFill>
+              </a:rPr>
               <a:t>MySQL/SQLite 持久化任务队列，五态状态机（PENDING / RUNNING / COMPLETED / FAILED / RETRY_PENDING），启动可恢复 stale 任务。</a:t>
             </a:r>
           </a:p>
@@ -10751,7 +11684,7 @@
         </p:blipFill>
         <p:spPr>
           <a:xfrm>
-            <a:off x="1346419" y="3655513"/>
+            <a:off x="1420063" y="3478096"/>
             <a:ext cx="5038016" cy="1679339"/>
           </a:xfrm>
           <a:prstGeom prst="rect">
